--- a/docs/pptx/whole/ritu-linsubhr-sens-akikdigo.pptx
+++ b/docs/pptx/whole/ritu-linsubhr-sens-akikdigo.pptx
@@ -2443,7 +2443,7 @@
           </p:nvSpPr>
           <p:spPr>
             <a:xfrm>
-              <a:off x="2520195" y="2073503"/>
+              <a:off x="2520043" y="2073503"/>
               <a:ext cx="0" cy="3649639"/>
             </a:xfrm>
             <a:custGeom>
@@ -2486,7 +2486,7 @@
           </p:nvSpPr>
           <p:spPr>
             <a:xfrm>
-              <a:off x="4326850" y="2073503"/>
+              <a:off x="4325074" y="2073503"/>
               <a:ext cx="0" cy="3649639"/>
             </a:xfrm>
             <a:custGeom>
@@ -2529,7 +2529,7 @@
           </p:nvSpPr>
           <p:spPr>
             <a:xfrm>
-              <a:off x="6133505" y="2073503"/>
+              <a:off x="6130105" y="2073503"/>
               <a:ext cx="0" cy="3649639"/>
             </a:xfrm>
             <a:custGeom>
@@ -2572,7 +2572,7 @@
           </p:nvSpPr>
           <p:spPr>
             <a:xfrm>
-              <a:off x="7940161" y="2073503"/>
+              <a:off x="7935136" y="2073503"/>
               <a:ext cx="0" cy="3649639"/>
             </a:xfrm>
             <a:custGeom>
@@ -2830,7 +2830,7 @@
           </p:nvSpPr>
           <p:spPr>
             <a:xfrm>
-              <a:off x="1616868" y="2073503"/>
+              <a:off x="1617528" y="2073503"/>
               <a:ext cx="0" cy="3649639"/>
             </a:xfrm>
             <a:custGeom>
@@ -2873,7 +2873,7 @@
           </p:nvSpPr>
           <p:spPr>
             <a:xfrm>
-              <a:off x="3423523" y="2073503"/>
+              <a:off x="3422559" y="2073503"/>
               <a:ext cx="0" cy="3649639"/>
             </a:xfrm>
             <a:custGeom>
@@ -2916,7 +2916,7 @@
           </p:nvSpPr>
           <p:spPr>
             <a:xfrm>
-              <a:off x="5230178" y="2073503"/>
+              <a:off x="5227590" y="2073503"/>
               <a:ext cx="0" cy="3649639"/>
             </a:xfrm>
             <a:custGeom>
@@ -2959,7 +2959,7 @@
           </p:nvSpPr>
           <p:spPr>
             <a:xfrm>
-              <a:off x="7036833" y="2073503"/>
+              <a:off x="7032620" y="2073503"/>
               <a:ext cx="0" cy="3649639"/>
             </a:xfrm>
             <a:custGeom>
@@ -3003,581 +3003,581 @@
           <p:spPr>
             <a:xfrm>
               <a:off x="1172049" y="2073503"/>
-              <a:ext cx="7090630" cy="3398670"/>
+              <a:ext cx="7090630" cy="3397640"/>
             </a:xfrm>
             <a:custGeom>
               <a:avLst/>
               <a:pathLst>
-                <a:path w="7090630" h="3398670">
+                <a:path w="7090630" h="3397640">
                   <a:moveTo>
-                    <a:pt x="735146" y="0"/>
+                    <a:pt x="729043" y="0"/>
                   </a:moveTo>
                   <a:lnTo>
-                    <a:pt x="787847" y="106173"/>
-                  </a:lnTo>
-                  <a:lnTo>
-                    <a:pt x="859470" y="244555"/>
-                  </a:lnTo>
-                  <a:lnTo>
-                    <a:pt x="931092" y="377267"/>
-                  </a:lnTo>
-                  <a:lnTo>
-                    <a:pt x="1002715" y="504542"/>
-                  </a:lnTo>
-                  <a:lnTo>
-                    <a:pt x="1074337" y="626602"/>
-                  </a:lnTo>
-                  <a:lnTo>
-                    <a:pt x="1145960" y="743661"/>
-                  </a:lnTo>
-                  <a:lnTo>
-                    <a:pt x="1217582" y="855924"/>
-                  </a:lnTo>
-                  <a:lnTo>
-                    <a:pt x="1289205" y="963588"/>
-                  </a:lnTo>
-                  <a:lnTo>
-                    <a:pt x="1360827" y="1066841"/>
-                  </a:lnTo>
-                  <a:lnTo>
-                    <a:pt x="1432450" y="1165863"/>
-                  </a:lnTo>
-                  <a:lnTo>
-                    <a:pt x="1504073" y="1260829"/>
-                  </a:lnTo>
-                  <a:lnTo>
-                    <a:pt x="1575695" y="1351903"/>
-                  </a:lnTo>
-                  <a:lnTo>
-                    <a:pt x="1647318" y="1439246"/>
-                  </a:lnTo>
-                  <a:lnTo>
-                    <a:pt x="1718940" y="1523011"/>
-                  </a:lnTo>
-                  <a:lnTo>
-                    <a:pt x="1790563" y="1603344"/>
-                  </a:lnTo>
-                  <a:lnTo>
-                    <a:pt x="1862185" y="1680385"/>
-                  </a:lnTo>
-                  <a:lnTo>
-                    <a:pt x="1933808" y="1754270"/>
-                  </a:lnTo>
-                  <a:lnTo>
-                    <a:pt x="2005430" y="1825128"/>
-                  </a:lnTo>
-                  <a:lnTo>
-                    <a:pt x="2077053" y="1893083"/>
-                  </a:lnTo>
-                  <a:lnTo>
-                    <a:pt x="2148675" y="1958254"/>
-                  </a:lnTo>
-                  <a:lnTo>
-                    <a:pt x="2220298" y="2020754"/>
-                  </a:lnTo>
-                  <a:lnTo>
-                    <a:pt x="2291920" y="2080694"/>
-                  </a:lnTo>
-                  <a:lnTo>
-                    <a:pt x="2363543" y="2138178"/>
-                  </a:lnTo>
-                  <a:lnTo>
-                    <a:pt x="2435165" y="2193307"/>
-                  </a:lnTo>
-                  <a:lnTo>
-                    <a:pt x="2506788" y="2246177"/>
-                  </a:lnTo>
-                  <a:lnTo>
-                    <a:pt x="2578410" y="2296881"/>
-                  </a:lnTo>
-                  <a:lnTo>
-                    <a:pt x="2650033" y="2345508"/>
-                  </a:lnTo>
-                  <a:lnTo>
-                    <a:pt x="2721655" y="2392143"/>
-                  </a:lnTo>
-                  <a:lnTo>
-                    <a:pt x="2793278" y="2436866"/>
-                  </a:lnTo>
-                  <a:lnTo>
-                    <a:pt x="2864901" y="2479758"/>
-                  </a:lnTo>
-                  <a:lnTo>
-                    <a:pt x="2936523" y="2520892"/>
-                  </a:lnTo>
-                  <a:lnTo>
-                    <a:pt x="3008146" y="2560341"/>
-                  </a:lnTo>
-                  <a:lnTo>
-                    <a:pt x="3079768" y="2598173"/>
-                  </a:lnTo>
-                  <a:lnTo>
-                    <a:pt x="3151391" y="2634456"/>
-                  </a:lnTo>
-                  <a:lnTo>
-                    <a:pt x="3223013" y="2657299"/>
-                  </a:lnTo>
-                  <a:lnTo>
-                    <a:pt x="3294636" y="2664185"/>
-                  </a:lnTo>
-                  <a:lnTo>
-                    <a:pt x="3366258" y="2671015"/>
-                  </a:lnTo>
-                  <a:lnTo>
-                    <a:pt x="3437881" y="2677787"/>
-                  </a:lnTo>
-                  <a:lnTo>
-                    <a:pt x="3509503" y="2684503"/>
-                  </a:lnTo>
-                  <a:lnTo>
-                    <a:pt x="3581126" y="2691162"/>
-                  </a:lnTo>
-                  <a:lnTo>
-                    <a:pt x="3652748" y="2697767"/>
-                  </a:lnTo>
-                  <a:lnTo>
-                    <a:pt x="3724371" y="2704316"/>
-                  </a:lnTo>
-                  <a:lnTo>
-                    <a:pt x="3795993" y="2710811"/>
-                  </a:lnTo>
-                  <a:lnTo>
-                    <a:pt x="3867616" y="2717251"/>
-                  </a:lnTo>
-                  <a:lnTo>
-                    <a:pt x="3939238" y="2723638"/>
-                  </a:lnTo>
-                  <a:lnTo>
-                    <a:pt x="4010861" y="2729972"/>
-                  </a:lnTo>
-                  <a:lnTo>
-                    <a:pt x="4082483" y="2736253"/>
-                  </a:lnTo>
-                  <a:lnTo>
-                    <a:pt x="4154106" y="2742482"/>
-                  </a:lnTo>
-                  <a:lnTo>
-                    <a:pt x="4225729" y="2748658"/>
-                  </a:lnTo>
-                  <a:lnTo>
-                    <a:pt x="4297351" y="2754784"/>
-                  </a:lnTo>
-                  <a:lnTo>
-                    <a:pt x="4368974" y="2760858"/>
-                  </a:lnTo>
-                  <a:lnTo>
-                    <a:pt x="4440596" y="2766882"/>
-                  </a:lnTo>
-                  <a:lnTo>
-                    <a:pt x="4512219" y="2772855"/>
-                  </a:lnTo>
-                  <a:lnTo>
-                    <a:pt x="4583841" y="2778779"/>
-                  </a:lnTo>
-                  <a:lnTo>
-                    <a:pt x="4655464" y="2784653"/>
-                  </a:lnTo>
-                  <a:lnTo>
-                    <a:pt x="4727086" y="2790478"/>
-                  </a:lnTo>
-                  <a:lnTo>
-                    <a:pt x="4798709" y="2796255"/>
-                  </a:lnTo>
-                  <a:lnTo>
-                    <a:pt x="4870331" y="2801984"/>
-                  </a:lnTo>
-                  <a:lnTo>
-                    <a:pt x="4941954" y="2807665"/>
-                  </a:lnTo>
-                  <a:lnTo>
-                    <a:pt x="5013576" y="2813298"/>
-                  </a:lnTo>
-                  <a:lnTo>
-                    <a:pt x="5085199" y="2818885"/>
-                  </a:lnTo>
-                  <a:lnTo>
-                    <a:pt x="5156821" y="2824425"/>
-                  </a:lnTo>
-                  <a:lnTo>
-                    <a:pt x="5228444" y="2829919"/>
-                  </a:lnTo>
-                  <a:lnTo>
-                    <a:pt x="5300066" y="2835367"/>
-                  </a:lnTo>
-                  <a:lnTo>
-                    <a:pt x="5371689" y="2840770"/>
-                  </a:lnTo>
-                  <a:lnTo>
-                    <a:pt x="5443311" y="2846127"/>
-                  </a:lnTo>
-                  <a:lnTo>
-                    <a:pt x="5514934" y="2851440"/>
-                  </a:lnTo>
-                  <a:lnTo>
-                    <a:pt x="5586557" y="2856709"/>
-                  </a:lnTo>
-                  <a:lnTo>
-                    <a:pt x="5658179" y="2861934"/>
-                  </a:lnTo>
-                  <a:lnTo>
-                    <a:pt x="5729802" y="2867116"/>
-                  </a:lnTo>
-                  <a:lnTo>
-                    <a:pt x="5801424" y="2872254"/>
-                  </a:lnTo>
-                  <a:lnTo>
-                    <a:pt x="5873047" y="2877349"/>
-                  </a:lnTo>
-                  <a:lnTo>
-                    <a:pt x="5944669" y="2882402"/>
-                  </a:lnTo>
-                  <a:lnTo>
-                    <a:pt x="6016292" y="2887413"/>
-                  </a:lnTo>
-                  <a:lnTo>
-                    <a:pt x="6087914" y="2892382"/>
-                  </a:lnTo>
-                  <a:lnTo>
-                    <a:pt x="6159537" y="2897310"/>
-                  </a:lnTo>
-                  <a:lnTo>
-                    <a:pt x="6231159" y="2902196"/>
-                  </a:lnTo>
-                  <a:lnTo>
-                    <a:pt x="6302782" y="2907042"/>
-                  </a:lnTo>
-                  <a:lnTo>
-                    <a:pt x="6374404" y="2911848"/>
-                  </a:lnTo>
-                  <a:lnTo>
-                    <a:pt x="6446027" y="2916613"/>
-                  </a:lnTo>
-                  <a:lnTo>
-                    <a:pt x="6517649" y="2921339"/>
-                  </a:lnTo>
-                  <a:lnTo>
-                    <a:pt x="6589272" y="2926025"/>
-                  </a:lnTo>
-                  <a:lnTo>
-                    <a:pt x="6660894" y="2930672"/>
-                  </a:lnTo>
-                  <a:lnTo>
-                    <a:pt x="6732517" y="2935281"/>
-                  </a:lnTo>
-                  <a:lnTo>
-                    <a:pt x="6804139" y="2939851"/>
-                  </a:lnTo>
-                  <a:lnTo>
-                    <a:pt x="6875762" y="2944383"/>
-                  </a:lnTo>
-                  <a:lnTo>
-                    <a:pt x="6947385" y="2948878"/>
-                  </a:lnTo>
-                  <a:lnTo>
-                    <a:pt x="7019007" y="2953335"/>
-                  </a:lnTo>
-                  <a:lnTo>
-                    <a:pt x="7090630" y="2957754"/>
-                  </a:lnTo>
-                  <a:lnTo>
-                    <a:pt x="7090630" y="3398670"/>
-                  </a:lnTo>
-                  <a:lnTo>
-                    <a:pt x="7019007" y="3395036"/>
-                  </a:lnTo>
-                  <a:lnTo>
-                    <a:pt x="6947385" y="3391246"/>
-                  </a:lnTo>
-                  <a:lnTo>
-                    <a:pt x="6875762" y="3387294"/>
-                  </a:lnTo>
-                  <a:lnTo>
-                    <a:pt x="6804139" y="3383173"/>
-                  </a:lnTo>
-                  <a:lnTo>
-                    <a:pt x="6732517" y="3378877"/>
-                  </a:lnTo>
-                  <a:lnTo>
-                    <a:pt x="6660894" y="3374397"/>
-                  </a:lnTo>
-                  <a:lnTo>
-                    <a:pt x="6589272" y="3369725"/>
-                  </a:lnTo>
-                  <a:lnTo>
-                    <a:pt x="6517649" y="3364854"/>
-                  </a:lnTo>
-                  <a:lnTo>
-                    <a:pt x="6446027" y="3359775"/>
-                  </a:lnTo>
-                  <a:lnTo>
-                    <a:pt x="6374404" y="3354479"/>
-                  </a:lnTo>
-                  <a:lnTo>
-                    <a:pt x="6302782" y="3348956"/>
-                  </a:lnTo>
-                  <a:lnTo>
-                    <a:pt x="6231159" y="3343198"/>
-                  </a:lnTo>
-                  <a:lnTo>
-                    <a:pt x="6159537" y="3337193"/>
-                  </a:lnTo>
-                  <a:lnTo>
-                    <a:pt x="6087914" y="3330933"/>
-                  </a:lnTo>
-                  <a:lnTo>
-                    <a:pt x="6016292" y="3324404"/>
-                  </a:lnTo>
-                  <a:lnTo>
-                    <a:pt x="5944669" y="3317597"/>
-                  </a:lnTo>
-                  <a:lnTo>
-                    <a:pt x="5873047" y="3310499"/>
-                  </a:lnTo>
-                  <a:lnTo>
-                    <a:pt x="5801424" y="3303098"/>
-                  </a:lnTo>
-                  <a:lnTo>
-                    <a:pt x="5729802" y="3295380"/>
-                  </a:lnTo>
-                  <a:lnTo>
-                    <a:pt x="5658179" y="3287333"/>
-                  </a:lnTo>
-                  <a:lnTo>
-                    <a:pt x="5586557" y="3278942"/>
-                  </a:lnTo>
-                  <a:lnTo>
-                    <a:pt x="5514934" y="3270192"/>
-                  </a:lnTo>
-                  <a:lnTo>
-                    <a:pt x="5443311" y="3261069"/>
-                  </a:lnTo>
-                  <a:lnTo>
-                    <a:pt x="5371689" y="3251556"/>
-                  </a:lnTo>
-                  <a:lnTo>
-                    <a:pt x="5300066" y="3241637"/>
-                  </a:lnTo>
-                  <a:lnTo>
-                    <a:pt x="5228444" y="3231294"/>
-                  </a:lnTo>
-                  <a:lnTo>
-                    <a:pt x="5156821" y="3220509"/>
-                  </a:lnTo>
-                  <a:lnTo>
-                    <a:pt x="5085199" y="3209263"/>
-                  </a:lnTo>
-                  <a:lnTo>
-                    <a:pt x="5013576" y="3197536"/>
-                  </a:lnTo>
-                  <a:lnTo>
-                    <a:pt x="4941954" y="3185309"/>
-                  </a:lnTo>
-                  <a:lnTo>
-                    <a:pt x="4870331" y="3172560"/>
-                  </a:lnTo>
-                  <a:lnTo>
-                    <a:pt x="4798709" y="3159266"/>
-                  </a:lnTo>
-                  <a:lnTo>
-                    <a:pt x="4727086" y="3145403"/>
-                  </a:lnTo>
-                  <a:lnTo>
-                    <a:pt x="4655464" y="3130949"/>
-                  </a:lnTo>
-                  <a:lnTo>
-                    <a:pt x="4583841" y="3115877"/>
-                  </a:lnTo>
-                  <a:lnTo>
-                    <a:pt x="4512219" y="3100161"/>
-                  </a:lnTo>
-                  <a:lnTo>
-                    <a:pt x="4440596" y="3083774"/>
-                  </a:lnTo>
-                  <a:lnTo>
-                    <a:pt x="4368974" y="3066687"/>
-                  </a:lnTo>
-                  <a:lnTo>
-                    <a:pt x="4297351" y="3048870"/>
-                  </a:lnTo>
-                  <a:lnTo>
-                    <a:pt x="4225729" y="3030291"/>
-                  </a:lnTo>
-                  <a:lnTo>
-                    <a:pt x="4154106" y="3010919"/>
-                  </a:lnTo>
-                  <a:lnTo>
-                    <a:pt x="4082483" y="2990720"/>
-                  </a:lnTo>
-                  <a:lnTo>
-                    <a:pt x="4010861" y="2969657"/>
-                  </a:lnTo>
-                  <a:lnTo>
-                    <a:pt x="3939238" y="2947695"/>
-                  </a:lnTo>
-                  <a:lnTo>
-                    <a:pt x="3867616" y="2924794"/>
-                  </a:lnTo>
-                  <a:lnTo>
-                    <a:pt x="3795993" y="2900915"/>
-                  </a:lnTo>
-                  <a:lnTo>
-                    <a:pt x="3724371" y="2876016"/>
-                  </a:lnTo>
-                  <a:lnTo>
-                    <a:pt x="3652748" y="2850053"/>
-                  </a:lnTo>
-                  <a:lnTo>
-                    <a:pt x="3581126" y="2822981"/>
-                  </a:lnTo>
-                  <a:lnTo>
-                    <a:pt x="3509503" y="2794752"/>
-                  </a:lnTo>
-                  <a:lnTo>
-                    <a:pt x="3437881" y="2765318"/>
-                  </a:lnTo>
-                  <a:lnTo>
-                    <a:pt x="3366258" y="2734626"/>
-                  </a:lnTo>
-                  <a:lnTo>
-                    <a:pt x="3294636" y="2702622"/>
-                  </a:lnTo>
-                  <a:lnTo>
-                    <a:pt x="3223013" y="2669252"/>
-                  </a:lnTo>
-                  <a:lnTo>
-                    <a:pt x="3151391" y="2650354"/>
-                  </a:lnTo>
-                  <a:lnTo>
-                    <a:pt x="3079768" y="2643352"/>
-                  </a:lnTo>
-                  <a:lnTo>
-                    <a:pt x="3008146" y="2636290"/>
-                  </a:lnTo>
-                  <a:lnTo>
-                    <a:pt x="2936523" y="2629169"/>
-                  </a:lnTo>
-                  <a:lnTo>
-                    <a:pt x="2864901" y="2621988"/>
-                  </a:lnTo>
-                  <a:lnTo>
-                    <a:pt x="2793278" y="2614747"/>
-                  </a:lnTo>
-                  <a:lnTo>
-                    <a:pt x="2721655" y="2607445"/>
-                  </a:lnTo>
-                  <a:lnTo>
-                    <a:pt x="2650033" y="2600082"/>
-                  </a:lnTo>
-                  <a:lnTo>
-                    <a:pt x="2578410" y="2592657"/>
-                  </a:lnTo>
-                  <a:lnTo>
-                    <a:pt x="2506788" y="2585169"/>
-                  </a:lnTo>
-                  <a:lnTo>
-                    <a:pt x="2435165" y="2577619"/>
-                  </a:lnTo>
-                  <a:lnTo>
-                    <a:pt x="2363543" y="2570005"/>
-                  </a:lnTo>
-                  <a:lnTo>
-                    <a:pt x="2291920" y="2562327"/>
-                  </a:lnTo>
-                  <a:lnTo>
-                    <a:pt x="2220298" y="2554585"/>
-                  </a:lnTo>
-                  <a:lnTo>
-                    <a:pt x="2148675" y="2546777"/>
-                  </a:lnTo>
-                  <a:lnTo>
-                    <a:pt x="2077053" y="2538904"/>
-                  </a:lnTo>
-                  <a:lnTo>
-                    <a:pt x="2005430" y="2530965"/>
-                  </a:lnTo>
-                  <a:lnTo>
-                    <a:pt x="1933808" y="2522959"/>
-                  </a:lnTo>
-                  <a:lnTo>
-                    <a:pt x="1862185" y="2514886"/>
-                  </a:lnTo>
-                  <a:lnTo>
-                    <a:pt x="1790563" y="2506745"/>
-                  </a:lnTo>
-                  <a:lnTo>
-                    <a:pt x="1718940" y="2498535"/>
-                  </a:lnTo>
-                  <a:lnTo>
-                    <a:pt x="1647318" y="2490257"/>
-                  </a:lnTo>
-                  <a:lnTo>
-                    <a:pt x="1575695" y="2481909"/>
-                  </a:lnTo>
-                  <a:lnTo>
-                    <a:pt x="1504073" y="2473491"/>
-                  </a:lnTo>
-                  <a:lnTo>
-                    <a:pt x="1432450" y="2465002"/>
-                  </a:lnTo>
-                  <a:lnTo>
-                    <a:pt x="1360827" y="2456442"/>
-                  </a:lnTo>
-                  <a:lnTo>
-                    <a:pt x="1289205" y="2447809"/>
-                  </a:lnTo>
-                  <a:lnTo>
-                    <a:pt x="1217582" y="2439105"/>
-                  </a:lnTo>
-                  <a:lnTo>
-                    <a:pt x="1145960" y="2430327"/>
-                  </a:lnTo>
-                  <a:lnTo>
-                    <a:pt x="1074337" y="2421475"/>
-                  </a:lnTo>
-                  <a:lnTo>
-                    <a:pt x="1002715" y="2412549"/>
-                  </a:lnTo>
-                  <a:lnTo>
-                    <a:pt x="931092" y="2403548"/>
-                  </a:lnTo>
-                  <a:lnTo>
-                    <a:pt x="859470" y="2394472"/>
-                  </a:lnTo>
-                  <a:lnTo>
-                    <a:pt x="787847" y="2385319"/>
-                  </a:lnTo>
-                  <a:lnTo>
-                    <a:pt x="716225" y="2376089"/>
-                  </a:lnTo>
-                  <a:lnTo>
-                    <a:pt x="644602" y="2366782"/>
-                  </a:lnTo>
-                  <a:lnTo>
-                    <a:pt x="572980" y="2357396"/>
-                  </a:lnTo>
-                  <a:lnTo>
-                    <a:pt x="501357" y="2347932"/>
-                  </a:lnTo>
-                  <a:lnTo>
-                    <a:pt x="429735" y="2338388"/>
-                  </a:lnTo>
-                  <a:lnTo>
-                    <a:pt x="358112" y="2328764"/>
-                  </a:lnTo>
-                  <a:lnTo>
-                    <a:pt x="286490" y="2319059"/>
-                  </a:lnTo>
-                  <a:lnTo>
-                    <a:pt x="214867" y="2309273"/>
-                  </a:lnTo>
-                  <a:lnTo>
-                    <a:pt x="143245" y="2299404"/>
-                  </a:lnTo>
-                  <a:lnTo>
-                    <a:pt x="71622" y="2289452"/>
-                  </a:lnTo>
-                  <a:lnTo>
-                    <a:pt x="0" y="2279417"/>
+                    <a:pt x="787847" y="117564"/>
+                  </a:lnTo>
+                  <a:lnTo>
+                    <a:pt x="859470" y="254913"/>
+                  </a:lnTo>
+                  <a:lnTo>
+                    <a:pt x="931092" y="386658"/>
+                  </a:lnTo>
+                  <a:lnTo>
+                    <a:pt x="1002715" y="513028"/>
+                  </a:lnTo>
+                  <a:lnTo>
+                    <a:pt x="1074337" y="634241"/>
+                  </a:lnTo>
+                  <a:lnTo>
+                    <a:pt x="1145960" y="750508"/>
+                  </a:lnTo>
+                  <a:lnTo>
+                    <a:pt x="1217582" y="862032"/>
+                  </a:lnTo>
+                  <a:lnTo>
+                    <a:pt x="1289205" y="969005"/>
+                  </a:lnTo>
+                  <a:lnTo>
+                    <a:pt x="1360827" y="1071613"/>
+                  </a:lnTo>
+                  <a:lnTo>
+                    <a:pt x="1432450" y="1170035"/>
+                  </a:lnTo>
+                  <a:lnTo>
+                    <a:pt x="1504073" y="1264440"/>
+                  </a:lnTo>
+                  <a:lnTo>
+                    <a:pt x="1575695" y="1354994"/>
+                  </a:lnTo>
+                  <a:lnTo>
+                    <a:pt x="1647318" y="1441853"/>
+                  </a:lnTo>
+                  <a:lnTo>
+                    <a:pt x="1718940" y="1525168"/>
+                  </a:lnTo>
+                  <a:lnTo>
+                    <a:pt x="1790563" y="1605083"/>
+                  </a:lnTo>
+                  <a:lnTo>
+                    <a:pt x="1862185" y="1681737"/>
+                  </a:lnTo>
+                  <a:lnTo>
+                    <a:pt x="1933808" y="1755264"/>
+                  </a:lnTo>
+                  <a:lnTo>
+                    <a:pt x="2005430" y="1825791"/>
+                  </a:lnTo>
+                  <a:lnTo>
+                    <a:pt x="2077053" y="1893440"/>
+                  </a:lnTo>
+                  <a:lnTo>
+                    <a:pt x="2148675" y="1958329"/>
+                  </a:lnTo>
+                  <a:lnTo>
+                    <a:pt x="2220298" y="2020570"/>
+                  </a:lnTo>
+                  <a:lnTo>
+                    <a:pt x="2291920" y="2080271"/>
+                  </a:lnTo>
+                  <a:lnTo>
+                    <a:pt x="2363543" y="2137537"/>
+                  </a:lnTo>
+                  <a:lnTo>
+                    <a:pt x="2435165" y="2192466"/>
+                  </a:lnTo>
+                  <a:lnTo>
+                    <a:pt x="2506788" y="2245154"/>
+                  </a:lnTo>
+                  <a:lnTo>
+                    <a:pt x="2578410" y="2295692"/>
+                  </a:lnTo>
+                  <a:lnTo>
+                    <a:pt x="2650033" y="2344167"/>
+                  </a:lnTo>
+                  <a:lnTo>
+                    <a:pt x="2721655" y="2390665"/>
+                  </a:lnTo>
+                  <a:lnTo>
+                    <a:pt x="2793278" y="2435266"/>
+                  </a:lnTo>
+                  <a:lnTo>
+                    <a:pt x="2864901" y="2478047"/>
+                  </a:lnTo>
+                  <a:lnTo>
+                    <a:pt x="2936523" y="2519082"/>
+                  </a:lnTo>
+                  <a:lnTo>
+                    <a:pt x="3008146" y="2558443"/>
+                  </a:lnTo>
+                  <a:lnTo>
+                    <a:pt x="3079768" y="2596198"/>
+                  </a:lnTo>
+                  <a:lnTo>
+                    <a:pt x="3151391" y="2632412"/>
+                  </a:lnTo>
+                  <a:lnTo>
+                    <a:pt x="3223013" y="2656741"/>
+                  </a:lnTo>
+                  <a:lnTo>
+                    <a:pt x="3294636" y="2663255"/>
+                  </a:lnTo>
+                  <a:lnTo>
+                    <a:pt x="3366258" y="2669717"/>
+                  </a:lnTo>
+                  <a:lnTo>
+                    <a:pt x="3437881" y="2676129"/>
+                  </a:lnTo>
+                  <a:lnTo>
+                    <a:pt x="3509503" y="2682490"/>
+                  </a:lnTo>
+                  <a:lnTo>
+                    <a:pt x="3581126" y="2688802"/>
+                  </a:lnTo>
+                  <a:lnTo>
+                    <a:pt x="3652748" y="2695063"/>
+                  </a:lnTo>
+                  <a:lnTo>
+                    <a:pt x="3724371" y="2701275"/>
+                  </a:lnTo>
+                  <a:lnTo>
+                    <a:pt x="3795993" y="2707438"/>
+                  </a:lnTo>
+                  <a:lnTo>
+                    <a:pt x="3867616" y="2713553"/>
+                  </a:lnTo>
+                  <a:lnTo>
+                    <a:pt x="3939238" y="2719620"/>
+                  </a:lnTo>
+                  <a:lnTo>
+                    <a:pt x="4010861" y="2725638"/>
+                  </a:lnTo>
+                  <a:lnTo>
+                    <a:pt x="4082483" y="2731610"/>
+                  </a:lnTo>
+                  <a:lnTo>
+                    <a:pt x="4154106" y="2737534"/>
+                  </a:lnTo>
+                  <a:lnTo>
+                    <a:pt x="4225729" y="2743412"/>
+                  </a:lnTo>
+                  <a:lnTo>
+                    <a:pt x="4297351" y="2749243"/>
+                  </a:lnTo>
+                  <a:lnTo>
+                    <a:pt x="4368974" y="2755028"/>
+                  </a:lnTo>
+                  <a:lnTo>
+                    <a:pt x="4440596" y="2760768"/>
+                  </a:lnTo>
+                  <a:lnTo>
+                    <a:pt x="4512219" y="2766463"/>
+                  </a:lnTo>
+                  <a:lnTo>
+                    <a:pt x="4583841" y="2772113"/>
+                  </a:lnTo>
+                  <a:lnTo>
+                    <a:pt x="4655464" y="2777718"/>
+                  </a:lnTo>
+                  <a:lnTo>
+                    <a:pt x="4727086" y="2783279"/>
+                  </a:lnTo>
+                  <a:lnTo>
+                    <a:pt x="4798709" y="2788796"/>
+                  </a:lnTo>
+                  <a:lnTo>
+                    <a:pt x="4870331" y="2794270"/>
+                  </a:lnTo>
+                  <a:lnTo>
+                    <a:pt x="4941954" y="2799701"/>
+                  </a:lnTo>
+                  <a:lnTo>
+                    <a:pt x="5013576" y="2805089"/>
+                  </a:lnTo>
+                  <a:lnTo>
+                    <a:pt x="5085199" y="2810434"/>
+                  </a:lnTo>
+                  <a:lnTo>
+                    <a:pt x="5156821" y="2815738"/>
+                  </a:lnTo>
+                  <a:lnTo>
+                    <a:pt x="5228444" y="2820999"/>
+                  </a:lnTo>
+                  <a:lnTo>
+                    <a:pt x="5300066" y="2826220"/>
+                  </a:lnTo>
+                  <a:lnTo>
+                    <a:pt x="5371689" y="2831399"/>
+                  </a:lnTo>
+                  <a:lnTo>
+                    <a:pt x="5443311" y="2836537"/>
+                  </a:lnTo>
+                  <a:lnTo>
+                    <a:pt x="5514934" y="2841635"/>
+                  </a:lnTo>
+                  <a:lnTo>
+                    <a:pt x="5586557" y="2846693"/>
+                  </a:lnTo>
+                  <a:lnTo>
+                    <a:pt x="5658179" y="2851710"/>
+                  </a:lnTo>
+                  <a:lnTo>
+                    <a:pt x="5729802" y="2856689"/>
+                  </a:lnTo>
+                  <a:lnTo>
+                    <a:pt x="5801424" y="2861628"/>
+                  </a:lnTo>
+                  <a:lnTo>
+                    <a:pt x="5873047" y="2866528"/>
+                  </a:lnTo>
+                  <a:lnTo>
+                    <a:pt x="5944669" y="2871390"/>
+                  </a:lnTo>
+                  <a:lnTo>
+                    <a:pt x="6016292" y="2876213"/>
+                  </a:lnTo>
+                  <a:lnTo>
+                    <a:pt x="6087914" y="2880998"/>
+                  </a:lnTo>
+                  <a:lnTo>
+                    <a:pt x="6159537" y="2885746"/>
+                  </a:lnTo>
+                  <a:lnTo>
+                    <a:pt x="6231159" y="2890456"/>
+                  </a:lnTo>
+                  <a:lnTo>
+                    <a:pt x="6302782" y="2895129"/>
+                  </a:lnTo>
+                  <a:lnTo>
+                    <a:pt x="6374404" y="2899765"/>
+                  </a:lnTo>
+                  <a:lnTo>
+                    <a:pt x="6446027" y="2904365"/>
+                  </a:lnTo>
+                  <a:lnTo>
+                    <a:pt x="6517649" y="2908929"/>
+                  </a:lnTo>
+                  <a:lnTo>
+                    <a:pt x="6589272" y="2913456"/>
+                  </a:lnTo>
+                  <a:lnTo>
+                    <a:pt x="6660894" y="2917948"/>
+                  </a:lnTo>
+                  <a:lnTo>
+                    <a:pt x="6732517" y="2922405"/>
+                  </a:lnTo>
+                  <a:lnTo>
+                    <a:pt x="6804139" y="2926826"/>
+                  </a:lnTo>
+                  <a:lnTo>
+                    <a:pt x="6875762" y="2931213"/>
+                  </a:lnTo>
+                  <a:lnTo>
+                    <a:pt x="6947385" y="2935565"/>
+                  </a:lnTo>
+                  <a:lnTo>
+                    <a:pt x="7019007" y="2939883"/>
+                  </a:lnTo>
+                  <a:lnTo>
+                    <a:pt x="7090630" y="2944167"/>
+                  </a:lnTo>
+                  <a:lnTo>
+                    <a:pt x="7090630" y="3397640"/>
+                  </a:lnTo>
+                  <a:lnTo>
+                    <a:pt x="7019007" y="3393977"/>
+                  </a:lnTo>
+                  <a:lnTo>
+                    <a:pt x="6947385" y="3390158"/>
+                  </a:lnTo>
+                  <a:lnTo>
+                    <a:pt x="6875762" y="3386177"/>
+                  </a:lnTo>
+                  <a:lnTo>
+                    <a:pt x="6804139" y="3382027"/>
+                  </a:lnTo>
+                  <a:lnTo>
+                    <a:pt x="6732517" y="3377700"/>
+                  </a:lnTo>
+                  <a:lnTo>
+                    <a:pt x="6660894" y="3373189"/>
+                  </a:lnTo>
+                  <a:lnTo>
+                    <a:pt x="6589272" y="3368486"/>
+                  </a:lnTo>
+                  <a:lnTo>
+                    <a:pt x="6517649" y="3363583"/>
+                  </a:lnTo>
+                  <a:lnTo>
+                    <a:pt x="6446027" y="3358471"/>
+                  </a:lnTo>
+                  <a:lnTo>
+                    <a:pt x="6374404" y="3353142"/>
+                  </a:lnTo>
+                  <a:lnTo>
+                    <a:pt x="6302782" y="3347586"/>
+                  </a:lnTo>
+                  <a:lnTo>
+                    <a:pt x="6231159" y="3341794"/>
+                  </a:lnTo>
+                  <a:lnTo>
+                    <a:pt x="6159537" y="3335756"/>
+                  </a:lnTo>
+                  <a:lnTo>
+                    <a:pt x="6087914" y="3329461"/>
+                  </a:lnTo>
+                  <a:lnTo>
+                    <a:pt x="6016292" y="3322898"/>
+                  </a:lnTo>
+                  <a:lnTo>
+                    <a:pt x="5944669" y="3316055"/>
+                  </a:lnTo>
+                  <a:lnTo>
+                    <a:pt x="5873047" y="3308922"/>
+                  </a:lnTo>
+                  <a:lnTo>
+                    <a:pt x="5801424" y="3301485"/>
+                  </a:lnTo>
+                  <a:lnTo>
+                    <a:pt x="5729802" y="3293732"/>
+                  </a:lnTo>
+                  <a:lnTo>
+                    <a:pt x="5658179" y="3285649"/>
+                  </a:lnTo>
+                  <a:lnTo>
+                    <a:pt x="5586557" y="3277222"/>
+                  </a:lnTo>
+                  <a:lnTo>
+                    <a:pt x="5514934" y="3268437"/>
+                  </a:lnTo>
+                  <a:lnTo>
+                    <a:pt x="5443311" y="3259278"/>
+                  </a:lnTo>
+                  <a:lnTo>
+                    <a:pt x="5371689" y="3249730"/>
+                  </a:lnTo>
+                  <a:lnTo>
+                    <a:pt x="5300066" y="3239775"/>
+                  </a:lnTo>
+                  <a:lnTo>
+                    <a:pt x="5228444" y="3229397"/>
+                  </a:lnTo>
+                  <a:lnTo>
+                    <a:pt x="5156821" y="3218577"/>
+                  </a:lnTo>
+                  <a:lnTo>
+                    <a:pt x="5085199" y="3207298"/>
+                  </a:lnTo>
+                  <a:lnTo>
+                    <a:pt x="5013576" y="3195538"/>
+                  </a:lnTo>
+                  <a:lnTo>
+                    <a:pt x="4941954" y="3183278"/>
+                  </a:lnTo>
+                  <a:lnTo>
+                    <a:pt x="4870331" y="3170497"/>
+                  </a:lnTo>
+                  <a:lnTo>
+                    <a:pt x="4798709" y="3157171"/>
+                  </a:lnTo>
+                  <a:lnTo>
+                    <a:pt x="4727086" y="3143279"/>
+                  </a:lnTo>
+                  <a:lnTo>
+                    <a:pt x="4655464" y="3128797"/>
+                  </a:lnTo>
+                  <a:lnTo>
+                    <a:pt x="4583841" y="3113698"/>
+                  </a:lnTo>
+                  <a:lnTo>
+                    <a:pt x="4512219" y="3097956"/>
+                  </a:lnTo>
+                  <a:lnTo>
+                    <a:pt x="4440596" y="3081545"/>
+                  </a:lnTo>
+                  <a:lnTo>
+                    <a:pt x="4368974" y="3064436"/>
+                  </a:lnTo>
+                  <a:lnTo>
+                    <a:pt x="4297351" y="3046600"/>
+                  </a:lnTo>
+                  <a:lnTo>
+                    <a:pt x="4225729" y="3028004"/>
+                  </a:lnTo>
+                  <a:lnTo>
+                    <a:pt x="4154106" y="3008618"/>
+                  </a:lnTo>
+                  <a:lnTo>
+                    <a:pt x="4082483" y="2988406"/>
+                  </a:lnTo>
+                  <a:lnTo>
+                    <a:pt x="4010861" y="2967335"/>
+                  </a:lnTo>
+                  <a:lnTo>
+                    <a:pt x="3939238" y="2945368"/>
+                  </a:lnTo>
+                  <a:lnTo>
+                    <a:pt x="3867616" y="2922466"/>
+                  </a:lnTo>
+                  <a:lnTo>
+                    <a:pt x="3795993" y="2898590"/>
+                  </a:lnTo>
+                  <a:lnTo>
+                    <a:pt x="3724371" y="2873699"/>
+                  </a:lnTo>
+                  <a:lnTo>
+                    <a:pt x="3652748" y="2847748"/>
+                  </a:lnTo>
+                  <a:lnTo>
+                    <a:pt x="3581126" y="2820694"/>
+                  </a:lnTo>
+                  <a:lnTo>
+                    <a:pt x="3509503" y="2792489"/>
+                  </a:lnTo>
+                  <a:lnTo>
+                    <a:pt x="3437881" y="2763084"/>
+                  </a:lnTo>
+                  <a:lnTo>
+                    <a:pt x="3366258" y="2732428"/>
+                  </a:lnTo>
+                  <a:lnTo>
+                    <a:pt x="3294636" y="2700468"/>
+                  </a:lnTo>
+                  <a:lnTo>
+                    <a:pt x="3223013" y="2667149"/>
+                  </a:lnTo>
+                  <a:lnTo>
+                    <a:pt x="3151391" y="2650175"/>
+                  </a:lnTo>
+                  <a:lnTo>
+                    <a:pt x="3079768" y="2643557"/>
+                  </a:lnTo>
+                  <a:lnTo>
+                    <a:pt x="3008146" y="2636887"/>
+                  </a:lnTo>
+                  <a:lnTo>
+                    <a:pt x="2936523" y="2630163"/>
+                  </a:lnTo>
+                  <a:lnTo>
+                    <a:pt x="2864901" y="2623387"/>
+                  </a:lnTo>
+                  <a:lnTo>
+                    <a:pt x="2793278" y="2616556"/>
+                  </a:lnTo>
+                  <a:lnTo>
+                    <a:pt x="2721655" y="2609671"/>
+                  </a:lnTo>
+                  <a:lnTo>
+                    <a:pt x="2650033" y="2602732"/>
+                  </a:lnTo>
+                  <a:lnTo>
+                    <a:pt x="2578410" y="2595737"/>
+                  </a:lnTo>
+                  <a:lnTo>
+                    <a:pt x="2506788" y="2588687"/>
+                  </a:lnTo>
+                  <a:lnTo>
+                    <a:pt x="2435165" y="2581581"/>
+                  </a:lnTo>
+                  <a:lnTo>
+                    <a:pt x="2363543" y="2574419"/>
+                  </a:lnTo>
+                  <a:lnTo>
+                    <a:pt x="2291920" y="2567200"/>
+                  </a:lnTo>
+                  <a:lnTo>
+                    <a:pt x="2220298" y="2559923"/>
+                  </a:lnTo>
+                  <a:lnTo>
+                    <a:pt x="2148675" y="2552589"/>
+                  </a:lnTo>
+                  <a:lnTo>
+                    <a:pt x="2077053" y="2545196"/>
+                  </a:lnTo>
+                  <a:lnTo>
+                    <a:pt x="2005430" y="2537745"/>
+                  </a:lnTo>
+                  <a:lnTo>
+                    <a:pt x="1933808" y="2530234"/>
+                  </a:lnTo>
+                  <a:lnTo>
+                    <a:pt x="1862185" y="2522664"/>
+                  </a:lnTo>
+                  <a:lnTo>
+                    <a:pt x="1790563" y="2515034"/>
+                  </a:lnTo>
+                  <a:lnTo>
+                    <a:pt x="1718940" y="2507343"/>
+                  </a:lnTo>
+                  <a:lnTo>
+                    <a:pt x="1647318" y="2499592"/>
+                  </a:lnTo>
+                  <a:lnTo>
+                    <a:pt x="1575695" y="2491778"/>
+                  </a:lnTo>
+                  <a:lnTo>
+                    <a:pt x="1504073" y="2483903"/>
+                  </a:lnTo>
+                  <a:lnTo>
+                    <a:pt x="1432450" y="2475965"/>
+                  </a:lnTo>
+                  <a:lnTo>
+                    <a:pt x="1360827" y="2467964"/>
+                  </a:lnTo>
+                  <a:lnTo>
+                    <a:pt x="1289205" y="2459900"/>
+                  </a:lnTo>
+                  <a:lnTo>
+                    <a:pt x="1217582" y="2451771"/>
+                  </a:lnTo>
+                  <a:lnTo>
+                    <a:pt x="1145960" y="2443578"/>
+                  </a:lnTo>
+                  <a:lnTo>
+                    <a:pt x="1074337" y="2435320"/>
+                  </a:lnTo>
+                  <a:lnTo>
+                    <a:pt x="1002715" y="2426996"/>
+                  </a:lnTo>
+                  <a:lnTo>
+                    <a:pt x="931092" y="2418607"/>
+                  </a:lnTo>
+                  <a:lnTo>
+                    <a:pt x="859470" y="2410150"/>
+                  </a:lnTo>
+                  <a:lnTo>
+                    <a:pt x="787847" y="2401627"/>
+                  </a:lnTo>
+                  <a:lnTo>
+                    <a:pt x="716225" y="2393036"/>
+                  </a:lnTo>
+                  <a:lnTo>
+                    <a:pt x="644602" y="2384377"/>
+                  </a:lnTo>
+                  <a:lnTo>
+                    <a:pt x="572980" y="2375648"/>
+                  </a:lnTo>
+                  <a:lnTo>
+                    <a:pt x="501357" y="2366851"/>
+                  </a:lnTo>
+                  <a:lnTo>
+                    <a:pt x="429735" y="2357984"/>
+                  </a:lnTo>
+                  <a:lnTo>
+                    <a:pt x="358112" y="2349046"/>
+                  </a:lnTo>
+                  <a:lnTo>
+                    <a:pt x="286490" y="2340038"/>
+                  </a:lnTo>
+                  <a:lnTo>
+                    <a:pt x="214867" y="2330958"/>
+                  </a:lnTo>
+                  <a:lnTo>
+                    <a:pt x="143245" y="2321805"/>
+                  </a:lnTo>
+                  <a:lnTo>
+                    <a:pt x="71622" y="2312581"/>
+                  </a:lnTo>
+                  <a:lnTo>
+                    <a:pt x="0" y="2303283"/>
                   </a:lnTo>
                   <a:close/>
                 </a:path>
@@ -3603,282 +3603,282 @@
           </p:nvSpPr>
           <p:spPr>
             <a:xfrm>
-              <a:off x="1907196" y="2073503"/>
-              <a:ext cx="6355483" cy="2957754"/>
+              <a:off x="1901093" y="2073503"/>
+              <a:ext cx="6361586" cy="2944167"/>
             </a:xfrm>
             <a:custGeom>
               <a:avLst/>
               <a:pathLst>
-                <a:path w="6355483" h="2957754">
+                <a:path w="6361586" h="2944167">
                   <a:moveTo>
                     <a:pt x="0" y="0"/>
                   </a:moveTo>
                   <a:lnTo>
-                    <a:pt x="52701" y="106173"/>
-                  </a:lnTo>
-                  <a:lnTo>
-                    <a:pt x="124323" y="244555"/>
-                  </a:lnTo>
-                  <a:lnTo>
-                    <a:pt x="195946" y="377267"/>
-                  </a:lnTo>
-                  <a:lnTo>
-                    <a:pt x="267568" y="504542"/>
-                  </a:lnTo>
-                  <a:lnTo>
-                    <a:pt x="339191" y="626602"/>
-                  </a:lnTo>
-                  <a:lnTo>
-                    <a:pt x="410813" y="743661"/>
-                  </a:lnTo>
-                  <a:lnTo>
-                    <a:pt x="482436" y="855924"/>
-                  </a:lnTo>
-                  <a:lnTo>
-                    <a:pt x="554058" y="963588"/>
-                  </a:lnTo>
-                  <a:lnTo>
-                    <a:pt x="625681" y="1066841"/>
-                  </a:lnTo>
-                  <a:lnTo>
-                    <a:pt x="697303" y="1165863"/>
-                  </a:lnTo>
-                  <a:lnTo>
-                    <a:pt x="768926" y="1260829"/>
-                  </a:lnTo>
-                  <a:lnTo>
-                    <a:pt x="840548" y="1351903"/>
-                  </a:lnTo>
-                  <a:lnTo>
-                    <a:pt x="912171" y="1439246"/>
-                  </a:lnTo>
-                  <a:lnTo>
-                    <a:pt x="983793" y="1523011"/>
-                  </a:lnTo>
-                  <a:lnTo>
-                    <a:pt x="1055416" y="1603344"/>
-                  </a:lnTo>
-                  <a:lnTo>
-                    <a:pt x="1127039" y="1680385"/>
-                  </a:lnTo>
-                  <a:lnTo>
-                    <a:pt x="1198661" y="1754270"/>
-                  </a:lnTo>
-                  <a:lnTo>
-                    <a:pt x="1270284" y="1825128"/>
-                  </a:lnTo>
-                  <a:lnTo>
-                    <a:pt x="1341906" y="1893083"/>
-                  </a:lnTo>
-                  <a:lnTo>
-                    <a:pt x="1413529" y="1958254"/>
-                  </a:lnTo>
-                  <a:lnTo>
-                    <a:pt x="1485151" y="2020754"/>
-                  </a:lnTo>
-                  <a:lnTo>
-                    <a:pt x="1556774" y="2080694"/>
-                  </a:lnTo>
-                  <a:lnTo>
-                    <a:pt x="1628396" y="2138178"/>
-                  </a:lnTo>
-                  <a:lnTo>
-                    <a:pt x="1700019" y="2193307"/>
-                  </a:lnTo>
-                  <a:lnTo>
-                    <a:pt x="1771641" y="2246177"/>
-                  </a:lnTo>
-                  <a:lnTo>
-                    <a:pt x="1843264" y="2296881"/>
-                  </a:lnTo>
-                  <a:lnTo>
-                    <a:pt x="1914886" y="2345508"/>
-                  </a:lnTo>
-                  <a:lnTo>
-                    <a:pt x="1986509" y="2392143"/>
-                  </a:lnTo>
-                  <a:lnTo>
-                    <a:pt x="2058131" y="2436866"/>
-                  </a:lnTo>
-                  <a:lnTo>
-                    <a:pt x="2129754" y="2479758"/>
-                  </a:lnTo>
-                  <a:lnTo>
-                    <a:pt x="2201376" y="2520892"/>
-                  </a:lnTo>
-                  <a:lnTo>
-                    <a:pt x="2272999" y="2560341"/>
-                  </a:lnTo>
-                  <a:lnTo>
-                    <a:pt x="2344621" y="2598173"/>
-                  </a:lnTo>
-                  <a:lnTo>
-                    <a:pt x="2416244" y="2634456"/>
-                  </a:lnTo>
-                  <a:lnTo>
-                    <a:pt x="2487867" y="2657299"/>
-                  </a:lnTo>
-                  <a:lnTo>
-                    <a:pt x="2559489" y="2664185"/>
-                  </a:lnTo>
-                  <a:lnTo>
-                    <a:pt x="2631112" y="2671015"/>
-                  </a:lnTo>
-                  <a:lnTo>
-                    <a:pt x="2702734" y="2677787"/>
-                  </a:lnTo>
-                  <a:lnTo>
-                    <a:pt x="2774357" y="2684503"/>
-                  </a:lnTo>
-                  <a:lnTo>
-                    <a:pt x="2845979" y="2691162"/>
-                  </a:lnTo>
-                  <a:lnTo>
-                    <a:pt x="2917602" y="2697767"/>
-                  </a:lnTo>
-                  <a:lnTo>
-                    <a:pt x="2989224" y="2704316"/>
-                  </a:lnTo>
-                  <a:lnTo>
-                    <a:pt x="3060847" y="2710811"/>
-                  </a:lnTo>
-                  <a:lnTo>
-                    <a:pt x="3132469" y="2717251"/>
-                  </a:lnTo>
-                  <a:lnTo>
-                    <a:pt x="3204092" y="2723638"/>
-                  </a:lnTo>
-                  <a:lnTo>
-                    <a:pt x="3275714" y="2729972"/>
-                  </a:lnTo>
-                  <a:lnTo>
-                    <a:pt x="3347337" y="2736253"/>
-                  </a:lnTo>
-                  <a:lnTo>
-                    <a:pt x="3418959" y="2742482"/>
-                  </a:lnTo>
-                  <a:lnTo>
-                    <a:pt x="3490582" y="2748658"/>
-                  </a:lnTo>
-                  <a:lnTo>
-                    <a:pt x="3562204" y="2754784"/>
-                  </a:lnTo>
-                  <a:lnTo>
-                    <a:pt x="3633827" y="2760858"/>
-                  </a:lnTo>
-                  <a:lnTo>
-                    <a:pt x="3705449" y="2766882"/>
-                  </a:lnTo>
-                  <a:lnTo>
-                    <a:pt x="3777072" y="2772855"/>
-                  </a:lnTo>
-                  <a:lnTo>
-                    <a:pt x="3848694" y="2778779"/>
-                  </a:lnTo>
-                  <a:lnTo>
-                    <a:pt x="3920317" y="2784653"/>
-                  </a:lnTo>
-                  <a:lnTo>
-                    <a:pt x="3991940" y="2790478"/>
-                  </a:lnTo>
-                  <a:lnTo>
-                    <a:pt x="4063562" y="2796255"/>
-                  </a:lnTo>
-                  <a:lnTo>
-                    <a:pt x="4135185" y="2801984"/>
-                  </a:lnTo>
-                  <a:lnTo>
-                    <a:pt x="4206807" y="2807665"/>
-                  </a:lnTo>
-                  <a:lnTo>
-                    <a:pt x="4278430" y="2813298"/>
-                  </a:lnTo>
-                  <a:lnTo>
-                    <a:pt x="4350052" y="2818885"/>
-                  </a:lnTo>
-                  <a:lnTo>
-                    <a:pt x="4421675" y="2824425"/>
-                  </a:lnTo>
-                  <a:lnTo>
-                    <a:pt x="4493297" y="2829919"/>
-                  </a:lnTo>
-                  <a:lnTo>
-                    <a:pt x="4564920" y="2835367"/>
-                  </a:lnTo>
-                  <a:lnTo>
-                    <a:pt x="4636542" y="2840770"/>
-                  </a:lnTo>
-                  <a:lnTo>
-                    <a:pt x="4708165" y="2846127"/>
-                  </a:lnTo>
-                  <a:lnTo>
-                    <a:pt x="4779787" y="2851440"/>
-                  </a:lnTo>
-                  <a:lnTo>
-                    <a:pt x="4851410" y="2856709"/>
-                  </a:lnTo>
-                  <a:lnTo>
-                    <a:pt x="4923032" y="2861934"/>
-                  </a:lnTo>
-                  <a:lnTo>
-                    <a:pt x="4994655" y="2867116"/>
-                  </a:lnTo>
-                  <a:lnTo>
-                    <a:pt x="5066277" y="2872254"/>
-                  </a:lnTo>
-                  <a:lnTo>
-                    <a:pt x="5137900" y="2877349"/>
-                  </a:lnTo>
-                  <a:lnTo>
-                    <a:pt x="5209522" y="2882402"/>
-                  </a:lnTo>
-                  <a:lnTo>
-                    <a:pt x="5281145" y="2887413"/>
-                  </a:lnTo>
-                  <a:lnTo>
-                    <a:pt x="5352768" y="2892382"/>
-                  </a:lnTo>
-                  <a:lnTo>
-                    <a:pt x="5424390" y="2897310"/>
-                  </a:lnTo>
-                  <a:lnTo>
-                    <a:pt x="5496013" y="2902196"/>
-                  </a:lnTo>
-                  <a:lnTo>
-                    <a:pt x="5567635" y="2907042"/>
-                  </a:lnTo>
-                  <a:lnTo>
-                    <a:pt x="5639258" y="2911848"/>
-                  </a:lnTo>
-                  <a:lnTo>
-                    <a:pt x="5710880" y="2916613"/>
-                  </a:lnTo>
-                  <a:lnTo>
-                    <a:pt x="5782503" y="2921339"/>
-                  </a:lnTo>
-                  <a:lnTo>
-                    <a:pt x="5854125" y="2926025"/>
-                  </a:lnTo>
-                  <a:lnTo>
-                    <a:pt x="5925748" y="2930672"/>
-                  </a:lnTo>
-                  <a:lnTo>
-                    <a:pt x="5997370" y="2935281"/>
-                  </a:lnTo>
-                  <a:lnTo>
-                    <a:pt x="6068993" y="2939851"/>
-                  </a:lnTo>
-                  <a:lnTo>
-                    <a:pt x="6140615" y="2944383"/>
-                  </a:lnTo>
-                  <a:lnTo>
-                    <a:pt x="6212238" y="2948878"/>
-                  </a:lnTo>
-                  <a:lnTo>
-                    <a:pt x="6283860" y="2953335"/>
-                  </a:lnTo>
-                  <a:lnTo>
-                    <a:pt x="6355483" y="2957754"/>
+                    <a:pt x="58803" y="117564"/>
+                  </a:lnTo>
+                  <a:lnTo>
+                    <a:pt x="130426" y="254913"/>
+                  </a:lnTo>
+                  <a:lnTo>
+                    <a:pt x="202048" y="386658"/>
+                  </a:lnTo>
+                  <a:lnTo>
+                    <a:pt x="273671" y="513028"/>
+                  </a:lnTo>
+                  <a:lnTo>
+                    <a:pt x="345293" y="634241"/>
+                  </a:lnTo>
+                  <a:lnTo>
+                    <a:pt x="416916" y="750508"/>
+                  </a:lnTo>
+                  <a:lnTo>
+                    <a:pt x="488538" y="862032"/>
+                  </a:lnTo>
+                  <a:lnTo>
+                    <a:pt x="560161" y="969005"/>
+                  </a:lnTo>
+                  <a:lnTo>
+                    <a:pt x="631784" y="1071613"/>
+                  </a:lnTo>
+                  <a:lnTo>
+                    <a:pt x="703406" y="1170035"/>
+                  </a:lnTo>
+                  <a:lnTo>
+                    <a:pt x="775029" y="1264440"/>
+                  </a:lnTo>
+                  <a:lnTo>
+                    <a:pt x="846651" y="1354994"/>
+                  </a:lnTo>
+                  <a:lnTo>
+                    <a:pt x="918274" y="1441853"/>
+                  </a:lnTo>
+                  <a:lnTo>
+                    <a:pt x="989896" y="1525168"/>
+                  </a:lnTo>
+                  <a:lnTo>
+                    <a:pt x="1061519" y="1605083"/>
+                  </a:lnTo>
+                  <a:lnTo>
+                    <a:pt x="1133141" y="1681737"/>
+                  </a:lnTo>
+                  <a:lnTo>
+                    <a:pt x="1204764" y="1755264"/>
+                  </a:lnTo>
+                  <a:lnTo>
+                    <a:pt x="1276386" y="1825791"/>
+                  </a:lnTo>
+                  <a:lnTo>
+                    <a:pt x="1348009" y="1893440"/>
+                  </a:lnTo>
+                  <a:lnTo>
+                    <a:pt x="1419631" y="1958329"/>
+                  </a:lnTo>
+                  <a:lnTo>
+                    <a:pt x="1491254" y="2020570"/>
+                  </a:lnTo>
+                  <a:lnTo>
+                    <a:pt x="1562876" y="2080271"/>
+                  </a:lnTo>
+                  <a:lnTo>
+                    <a:pt x="1634499" y="2137537"/>
+                  </a:lnTo>
+                  <a:lnTo>
+                    <a:pt x="1706121" y="2192466"/>
+                  </a:lnTo>
+                  <a:lnTo>
+                    <a:pt x="1777744" y="2245154"/>
+                  </a:lnTo>
+                  <a:lnTo>
+                    <a:pt x="1849366" y="2295692"/>
+                  </a:lnTo>
+                  <a:lnTo>
+                    <a:pt x="1920989" y="2344167"/>
+                  </a:lnTo>
+                  <a:lnTo>
+                    <a:pt x="1992612" y="2390665"/>
+                  </a:lnTo>
+                  <a:lnTo>
+                    <a:pt x="2064234" y="2435266"/>
+                  </a:lnTo>
+                  <a:lnTo>
+                    <a:pt x="2135857" y="2478047"/>
+                  </a:lnTo>
+                  <a:lnTo>
+                    <a:pt x="2207479" y="2519082"/>
+                  </a:lnTo>
+                  <a:lnTo>
+                    <a:pt x="2279102" y="2558443"/>
+                  </a:lnTo>
+                  <a:lnTo>
+                    <a:pt x="2350724" y="2596198"/>
+                  </a:lnTo>
+                  <a:lnTo>
+                    <a:pt x="2422347" y="2632412"/>
+                  </a:lnTo>
+                  <a:lnTo>
+                    <a:pt x="2493969" y="2656741"/>
+                  </a:lnTo>
+                  <a:lnTo>
+                    <a:pt x="2565592" y="2663255"/>
+                  </a:lnTo>
+                  <a:lnTo>
+                    <a:pt x="2637214" y="2669717"/>
+                  </a:lnTo>
+                  <a:lnTo>
+                    <a:pt x="2708837" y="2676129"/>
+                  </a:lnTo>
+                  <a:lnTo>
+                    <a:pt x="2780459" y="2682490"/>
+                  </a:lnTo>
+                  <a:lnTo>
+                    <a:pt x="2852082" y="2688802"/>
+                  </a:lnTo>
+                  <a:lnTo>
+                    <a:pt x="2923704" y="2695063"/>
+                  </a:lnTo>
+                  <a:lnTo>
+                    <a:pt x="2995327" y="2701275"/>
+                  </a:lnTo>
+                  <a:lnTo>
+                    <a:pt x="3066949" y="2707438"/>
+                  </a:lnTo>
+                  <a:lnTo>
+                    <a:pt x="3138572" y="2713553"/>
+                  </a:lnTo>
+                  <a:lnTo>
+                    <a:pt x="3210194" y="2719620"/>
+                  </a:lnTo>
+                  <a:lnTo>
+                    <a:pt x="3281817" y="2725638"/>
+                  </a:lnTo>
+                  <a:lnTo>
+                    <a:pt x="3353440" y="2731610"/>
+                  </a:lnTo>
+                  <a:lnTo>
+                    <a:pt x="3425062" y="2737534"/>
+                  </a:lnTo>
+                  <a:lnTo>
+                    <a:pt x="3496685" y="2743412"/>
+                  </a:lnTo>
+                  <a:lnTo>
+                    <a:pt x="3568307" y="2749243"/>
+                  </a:lnTo>
+                  <a:lnTo>
+                    <a:pt x="3639930" y="2755028"/>
+                  </a:lnTo>
+                  <a:lnTo>
+                    <a:pt x="3711552" y="2760768"/>
+                  </a:lnTo>
+                  <a:lnTo>
+                    <a:pt x="3783175" y="2766463"/>
+                  </a:lnTo>
+                  <a:lnTo>
+                    <a:pt x="3854797" y="2772113"/>
+                  </a:lnTo>
+                  <a:lnTo>
+                    <a:pt x="3926420" y="2777718"/>
+                  </a:lnTo>
+                  <a:lnTo>
+                    <a:pt x="3998042" y="2783279"/>
+                  </a:lnTo>
+                  <a:lnTo>
+                    <a:pt x="4069665" y="2788796"/>
+                  </a:lnTo>
+                  <a:lnTo>
+                    <a:pt x="4141287" y="2794270"/>
+                  </a:lnTo>
+                  <a:lnTo>
+                    <a:pt x="4212910" y="2799701"/>
+                  </a:lnTo>
+                  <a:lnTo>
+                    <a:pt x="4284532" y="2805089"/>
+                  </a:lnTo>
+                  <a:lnTo>
+                    <a:pt x="4356155" y="2810434"/>
+                  </a:lnTo>
+                  <a:lnTo>
+                    <a:pt x="4427777" y="2815738"/>
+                  </a:lnTo>
+                  <a:lnTo>
+                    <a:pt x="4499400" y="2820999"/>
+                  </a:lnTo>
+                  <a:lnTo>
+                    <a:pt x="4571022" y="2826220"/>
+                  </a:lnTo>
+                  <a:lnTo>
+                    <a:pt x="4642645" y="2831399"/>
+                  </a:lnTo>
+                  <a:lnTo>
+                    <a:pt x="4714268" y="2836537"/>
+                  </a:lnTo>
+                  <a:lnTo>
+                    <a:pt x="4785890" y="2841635"/>
+                  </a:lnTo>
+                  <a:lnTo>
+                    <a:pt x="4857513" y="2846693"/>
+                  </a:lnTo>
+                  <a:lnTo>
+                    <a:pt x="4929135" y="2851710"/>
+                  </a:lnTo>
+                  <a:lnTo>
+                    <a:pt x="5000758" y="2856689"/>
+                  </a:lnTo>
+                  <a:lnTo>
+                    <a:pt x="5072380" y="2861628"/>
+                  </a:lnTo>
+                  <a:lnTo>
+                    <a:pt x="5144003" y="2866528"/>
+                  </a:lnTo>
+                  <a:lnTo>
+                    <a:pt x="5215625" y="2871390"/>
+                  </a:lnTo>
+                  <a:lnTo>
+                    <a:pt x="5287248" y="2876213"/>
+                  </a:lnTo>
+                  <a:lnTo>
+                    <a:pt x="5358870" y="2880998"/>
+                  </a:lnTo>
+                  <a:lnTo>
+                    <a:pt x="5430493" y="2885746"/>
+                  </a:lnTo>
+                  <a:lnTo>
+                    <a:pt x="5502115" y="2890456"/>
+                  </a:lnTo>
+                  <a:lnTo>
+                    <a:pt x="5573738" y="2895129"/>
+                  </a:lnTo>
+                  <a:lnTo>
+                    <a:pt x="5645360" y="2899765"/>
+                  </a:lnTo>
+                  <a:lnTo>
+                    <a:pt x="5716983" y="2904365"/>
+                  </a:lnTo>
+                  <a:lnTo>
+                    <a:pt x="5788605" y="2908929"/>
+                  </a:lnTo>
+                  <a:lnTo>
+                    <a:pt x="5860228" y="2913456"/>
+                  </a:lnTo>
+                  <a:lnTo>
+                    <a:pt x="5931850" y="2917948"/>
+                  </a:lnTo>
+                  <a:lnTo>
+                    <a:pt x="6003473" y="2922405"/>
+                  </a:lnTo>
+                  <a:lnTo>
+                    <a:pt x="6075096" y="2926826"/>
+                  </a:lnTo>
+                  <a:lnTo>
+                    <a:pt x="6146718" y="2931213"/>
+                  </a:lnTo>
+                  <a:lnTo>
+                    <a:pt x="6218341" y="2935565"/>
+                  </a:lnTo>
+                  <a:lnTo>
+                    <a:pt x="6289963" y="2939883"/>
+                  </a:lnTo>
+                  <a:lnTo>
+                    <a:pt x="6361586" y="2944167"/>
                   </a:lnTo>
                 </a:path>
               </a:pathLst>
@@ -3898,309 +3898,309 @@
           </p:nvSpPr>
           <p:spPr>
             <a:xfrm>
-              <a:off x="1172049" y="4352920"/>
-              <a:ext cx="7090630" cy="1119253"/>
+              <a:off x="1172049" y="4376786"/>
+              <a:ext cx="7090630" cy="1094357"/>
             </a:xfrm>
             <a:custGeom>
               <a:avLst/>
               <a:pathLst>
-                <a:path w="7090630" h="1119253">
+                <a:path w="7090630" h="1094357">
                   <a:moveTo>
-                    <a:pt x="7090630" y="1119253"/>
+                    <a:pt x="7090630" y="1094357"/>
                   </a:moveTo>
                   <a:lnTo>
-                    <a:pt x="7019007" y="1115618"/>
-                  </a:lnTo>
-                  <a:lnTo>
-                    <a:pt x="6947385" y="1111828"/>
-                  </a:lnTo>
-                  <a:lnTo>
-                    <a:pt x="6875762" y="1107877"/>
-                  </a:lnTo>
-                  <a:lnTo>
-                    <a:pt x="6804139" y="1103756"/>
-                  </a:lnTo>
-                  <a:lnTo>
-                    <a:pt x="6732517" y="1099460"/>
-                  </a:lnTo>
-                  <a:lnTo>
-                    <a:pt x="6660894" y="1094979"/>
-                  </a:lnTo>
-                  <a:lnTo>
-                    <a:pt x="6589272" y="1090308"/>
-                  </a:lnTo>
-                  <a:lnTo>
-                    <a:pt x="6517649" y="1085437"/>
-                  </a:lnTo>
-                  <a:lnTo>
-                    <a:pt x="6446027" y="1080358"/>
-                  </a:lnTo>
-                  <a:lnTo>
-                    <a:pt x="6374404" y="1075061"/>
-                  </a:lnTo>
-                  <a:lnTo>
-                    <a:pt x="6302782" y="1069539"/>
-                  </a:lnTo>
-                  <a:lnTo>
-                    <a:pt x="6231159" y="1063781"/>
-                  </a:lnTo>
-                  <a:lnTo>
-                    <a:pt x="6159537" y="1057776"/>
-                  </a:lnTo>
-                  <a:lnTo>
-                    <a:pt x="6087914" y="1051515"/>
-                  </a:lnTo>
-                  <a:lnTo>
-                    <a:pt x="6016292" y="1044987"/>
-                  </a:lnTo>
-                  <a:lnTo>
-                    <a:pt x="5944669" y="1038180"/>
-                  </a:lnTo>
-                  <a:lnTo>
-                    <a:pt x="5873047" y="1031082"/>
-                  </a:lnTo>
-                  <a:lnTo>
-                    <a:pt x="5801424" y="1023680"/>
-                  </a:lnTo>
-                  <a:lnTo>
-                    <a:pt x="5729802" y="1015963"/>
-                  </a:lnTo>
-                  <a:lnTo>
-                    <a:pt x="5658179" y="1007916"/>
-                  </a:lnTo>
-                  <a:lnTo>
-                    <a:pt x="5586557" y="999525"/>
-                  </a:lnTo>
-                  <a:lnTo>
-                    <a:pt x="5514934" y="990775"/>
-                  </a:lnTo>
-                  <a:lnTo>
-                    <a:pt x="5443311" y="981652"/>
-                  </a:lnTo>
-                  <a:lnTo>
-                    <a:pt x="5371689" y="972139"/>
-                  </a:lnTo>
-                  <a:lnTo>
-                    <a:pt x="5300066" y="962219"/>
-                  </a:lnTo>
-                  <a:lnTo>
-                    <a:pt x="5228444" y="951876"/>
-                  </a:lnTo>
-                  <a:lnTo>
-                    <a:pt x="5156821" y="941091"/>
-                  </a:lnTo>
-                  <a:lnTo>
-                    <a:pt x="5085199" y="929845"/>
-                  </a:lnTo>
-                  <a:lnTo>
-                    <a:pt x="5013576" y="918119"/>
-                  </a:lnTo>
-                  <a:lnTo>
-                    <a:pt x="4941954" y="905892"/>
-                  </a:lnTo>
-                  <a:lnTo>
-                    <a:pt x="4870331" y="893142"/>
-                  </a:lnTo>
-                  <a:lnTo>
-                    <a:pt x="4798709" y="879848"/>
-                  </a:lnTo>
-                  <a:lnTo>
-                    <a:pt x="4727086" y="865986"/>
-                  </a:lnTo>
-                  <a:lnTo>
-                    <a:pt x="4655464" y="851532"/>
-                  </a:lnTo>
-                  <a:lnTo>
-                    <a:pt x="4583841" y="836460"/>
-                  </a:lnTo>
-                  <a:lnTo>
-                    <a:pt x="4512219" y="820744"/>
-                  </a:lnTo>
-                  <a:lnTo>
-                    <a:pt x="4440596" y="804357"/>
-                  </a:lnTo>
-                  <a:lnTo>
-                    <a:pt x="4368974" y="787270"/>
-                  </a:lnTo>
-                  <a:lnTo>
-                    <a:pt x="4297351" y="769452"/>
-                  </a:lnTo>
-                  <a:lnTo>
-                    <a:pt x="4225729" y="750874"/>
-                  </a:lnTo>
-                  <a:lnTo>
-                    <a:pt x="4154106" y="731502"/>
-                  </a:lnTo>
-                  <a:lnTo>
-                    <a:pt x="4082483" y="711302"/>
-                  </a:lnTo>
-                  <a:lnTo>
-                    <a:pt x="4010861" y="690240"/>
-                  </a:lnTo>
-                  <a:lnTo>
-                    <a:pt x="3939238" y="668277"/>
-                  </a:lnTo>
-                  <a:lnTo>
-                    <a:pt x="3867616" y="645377"/>
-                  </a:lnTo>
-                  <a:lnTo>
-                    <a:pt x="3795993" y="621498"/>
-                  </a:lnTo>
-                  <a:lnTo>
-                    <a:pt x="3724371" y="596598"/>
-                  </a:lnTo>
-                  <a:lnTo>
-                    <a:pt x="3652748" y="570636"/>
-                  </a:lnTo>
-                  <a:lnTo>
-                    <a:pt x="3581126" y="543563"/>
-                  </a:lnTo>
-                  <a:lnTo>
-                    <a:pt x="3509503" y="515335"/>
-                  </a:lnTo>
-                  <a:lnTo>
-                    <a:pt x="3437881" y="485900"/>
-                  </a:lnTo>
-                  <a:lnTo>
-                    <a:pt x="3366258" y="455208"/>
-                  </a:lnTo>
-                  <a:lnTo>
-                    <a:pt x="3294636" y="423205"/>
-                  </a:lnTo>
-                  <a:lnTo>
-                    <a:pt x="3223013" y="389835"/>
-                  </a:lnTo>
-                  <a:lnTo>
-                    <a:pt x="3151391" y="370937"/>
-                  </a:lnTo>
-                  <a:lnTo>
-                    <a:pt x="3079768" y="363934"/>
-                  </a:lnTo>
-                  <a:lnTo>
-                    <a:pt x="3008146" y="356873"/>
-                  </a:lnTo>
-                  <a:lnTo>
-                    <a:pt x="2936523" y="349752"/>
-                  </a:lnTo>
-                  <a:lnTo>
-                    <a:pt x="2864901" y="342571"/>
-                  </a:lnTo>
-                  <a:lnTo>
-                    <a:pt x="2793278" y="335330"/>
-                  </a:lnTo>
-                  <a:lnTo>
-                    <a:pt x="2721655" y="328028"/>
-                  </a:lnTo>
-                  <a:lnTo>
-                    <a:pt x="2650033" y="320665"/>
-                  </a:lnTo>
-                  <a:lnTo>
-                    <a:pt x="2578410" y="313240"/>
-                  </a:lnTo>
-                  <a:lnTo>
-                    <a:pt x="2506788" y="305752"/>
-                  </a:lnTo>
-                  <a:lnTo>
-                    <a:pt x="2435165" y="298202"/>
-                  </a:lnTo>
-                  <a:lnTo>
-                    <a:pt x="2363543" y="290588"/>
-                  </a:lnTo>
-                  <a:lnTo>
-                    <a:pt x="2291920" y="282910"/>
-                  </a:lnTo>
-                  <a:lnTo>
-                    <a:pt x="2220298" y="275167"/>
-                  </a:lnTo>
-                  <a:lnTo>
-                    <a:pt x="2148675" y="267360"/>
-                  </a:lnTo>
-                  <a:lnTo>
-                    <a:pt x="2077053" y="259487"/>
-                  </a:lnTo>
-                  <a:lnTo>
-                    <a:pt x="2005430" y="251548"/>
-                  </a:lnTo>
-                  <a:lnTo>
-                    <a:pt x="1933808" y="243542"/>
-                  </a:lnTo>
-                  <a:lnTo>
-                    <a:pt x="1862185" y="235468"/>
-                  </a:lnTo>
-                  <a:lnTo>
-                    <a:pt x="1790563" y="227327"/>
-                  </a:lnTo>
-                  <a:lnTo>
-                    <a:pt x="1718940" y="219118"/>
-                  </a:lnTo>
-                  <a:lnTo>
-                    <a:pt x="1647318" y="210839"/>
-                  </a:lnTo>
-                  <a:lnTo>
-                    <a:pt x="1575695" y="202491"/>
-                  </a:lnTo>
-                  <a:lnTo>
-                    <a:pt x="1504073" y="194073"/>
-                  </a:lnTo>
-                  <a:lnTo>
-                    <a:pt x="1432450" y="185584"/>
-                  </a:lnTo>
-                  <a:lnTo>
-                    <a:pt x="1360827" y="177024"/>
-                  </a:lnTo>
-                  <a:lnTo>
-                    <a:pt x="1289205" y="168392"/>
-                  </a:lnTo>
-                  <a:lnTo>
-                    <a:pt x="1217582" y="159687"/>
-                  </a:lnTo>
-                  <a:lnTo>
-                    <a:pt x="1145960" y="150910"/>
-                  </a:lnTo>
-                  <a:lnTo>
-                    <a:pt x="1074337" y="142058"/>
-                  </a:lnTo>
-                  <a:lnTo>
-                    <a:pt x="1002715" y="133132"/>
-                  </a:lnTo>
-                  <a:lnTo>
-                    <a:pt x="931092" y="124131"/>
-                  </a:lnTo>
-                  <a:lnTo>
-                    <a:pt x="859470" y="115055"/>
-                  </a:lnTo>
-                  <a:lnTo>
-                    <a:pt x="787847" y="105902"/>
-                  </a:lnTo>
-                  <a:lnTo>
-                    <a:pt x="716225" y="96672"/>
-                  </a:lnTo>
-                  <a:lnTo>
-                    <a:pt x="644602" y="87365"/>
-                  </a:lnTo>
-                  <a:lnTo>
-                    <a:pt x="572980" y="77979"/>
-                  </a:lnTo>
-                  <a:lnTo>
-                    <a:pt x="501357" y="68515"/>
-                  </a:lnTo>
-                  <a:lnTo>
-                    <a:pt x="429735" y="58971"/>
-                  </a:lnTo>
-                  <a:lnTo>
-                    <a:pt x="358112" y="49347"/>
-                  </a:lnTo>
-                  <a:lnTo>
-                    <a:pt x="286490" y="39642"/>
-                  </a:lnTo>
-                  <a:lnTo>
-                    <a:pt x="214867" y="29855"/>
-                  </a:lnTo>
-                  <a:lnTo>
-                    <a:pt x="143245" y="19986"/>
-                  </a:lnTo>
-                  <a:lnTo>
-                    <a:pt x="71622" y="10035"/>
+                    <a:pt x="7019007" y="1090694"/>
+                  </a:lnTo>
+                  <a:lnTo>
+                    <a:pt x="6947385" y="1086875"/>
+                  </a:lnTo>
+                  <a:lnTo>
+                    <a:pt x="6875762" y="1082894"/>
+                  </a:lnTo>
+                  <a:lnTo>
+                    <a:pt x="6804139" y="1078743"/>
+                  </a:lnTo>
+                  <a:lnTo>
+                    <a:pt x="6732517" y="1074416"/>
+                  </a:lnTo>
+                  <a:lnTo>
+                    <a:pt x="6660894" y="1069905"/>
+                  </a:lnTo>
+                  <a:lnTo>
+                    <a:pt x="6589272" y="1065202"/>
+                  </a:lnTo>
+                  <a:lnTo>
+                    <a:pt x="6517649" y="1060299"/>
+                  </a:lnTo>
+                  <a:lnTo>
+                    <a:pt x="6446027" y="1055188"/>
+                  </a:lnTo>
+                  <a:lnTo>
+                    <a:pt x="6374404" y="1049859"/>
+                  </a:lnTo>
+                  <a:lnTo>
+                    <a:pt x="6302782" y="1044303"/>
+                  </a:lnTo>
+                  <a:lnTo>
+                    <a:pt x="6231159" y="1038511"/>
+                  </a:lnTo>
+                  <a:lnTo>
+                    <a:pt x="6159537" y="1032473"/>
+                  </a:lnTo>
+                  <a:lnTo>
+                    <a:pt x="6087914" y="1026177"/>
+                  </a:lnTo>
+                  <a:lnTo>
+                    <a:pt x="6016292" y="1019614"/>
+                  </a:lnTo>
+                  <a:lnTo>
+                    <a:pt x="5944669" y="1012772"/>
+                  </a:lnTo>
+                  <a:lnTo>
+                    <a:pt x="5873047" y="1005639"/>
+                  </a:lnTo>
+                  <a:lnTo>
+                    <a:pt x="5801424" y="998202"/>
+                  </a:lnTo>
+                  <a:lnTo>
+                    <a:pt x="5729802" y="990449"/>
+                  </a:lnTo>
+                  <a:lnTo>
+                    <a:pt x="5658179" y="982366"/>
+                  </a:lnTo>
+                  <a:lnTo>
+                    <a:pt x="5586557" y="973939"/>
+                  </a:lnTo>
+                  <a:lnTo>
+                    <a:pt x="5514934" y="965154"/>
+                  </a:lnTo>
+                  <a:lnTo>
+                    <a:pt x="5443311" y="955995"/>
+                  </a:lnTo>
+                  <a:lnTo>
+                    <a:pt x="5371689" y="946447"/>
+                  </a:lnTo>
+                  <a:lnTo>
+                    <a:pt x="5300066" y="936492"/>
+                  </a:lnTo>
+                  <a:lnTo>
+                    <a:pt x="5228444" y="926114"/>
+                  </a:lnTo>
+                  <a:lnTo>
+                    <a:pt x="5156821" y="915294"/>
+                  </a:lnTo>
+                  <a:lnTo>
+                    <a:pt x="5085199" y="904014"/>
+                  </a:lnTo>
+                  <a:lnTo>
+                    <a:pt x="5013576" y="892255"/>
+                  </a:lnTo>
+                  <a:lnTo>
+                    <a:pt x="4941954" y="879995"/>
+                  </a:lnTo>
+                  <a:lnTo>
+                    <a:pt x="4870331" y="867213"/>
+                  </a:lnTo>
+                  <a:lnTo>
+                    <a:pt x="4798709" y="853888"/>
+                  </a:lnTo>
+                  <a:lnTo>
+                    <a:pt x="4727086" y="839996"/>
+                  </a:lnTo>
+                  <a:lnTo>
+                    <a:pt x="4655464" y="825513"/>
+                  </a:lnTo>
+                  <a:lnTo>
+                    <a:pt x="4583841" y="810414"/>
+                  </a:lnTo>
+                  <a:lnTo>
+                    <a:pt x="4512219" y="794673"/>
+                  </a:lnTo>
+                  <a:lnTo>
+                    <a:pt x="4440596" y="778262"/>
+                  </a:lnTo>
+                  <a:lnTo>
+                    <a:pt x="4368974" y="761153"/>
+                  </a:lnTo>
+                  <a:lnTo>
+                    <a:pt x="4297351" y="743317"/>
+                  </a:lnTo>
+                  <a:lnTo>
+                    <a:pt x="4225729" y="724721"/>
+                  </a:lnTo>
+                  <a:lnTo>
+                    <a:pt x="4154106" y="705334"/>
+                  </a:lnTo>
+                  <a:lnTo>
+                    <a:pt x="4082483" y="685123"/>
+                  </a:lnTo>
+                  <a:lnTo>
+                    <a:pt x="4010861" y="664052"/>
+                  </a:lnTo>
+                  <a:lnTo>
+                    <a:pt x="3939238" y="642085"/>
+                  </a:lnTo>
+                  <a:lnTo>
+                    <a:pt x="3867616" y="619183"/>
+                  </a:lnTo>
+                  <a:lnTo>
+                    <a:pt x="3795993" y="595307"/>
+                  </a:lnTo>
+                  <a:lnTo>
+                    <a:pt x="3724371" y="570416"/>
+                  </a:lnTo>
+                  <a:lnTo>
+                    <a:pt x="3652748" y="544465"/>
+                  </a:lnTo>
+                  <a:lnTo>
+                    <a:pt x="3581126" y="517411"/>
+                  </a:lnTo>
+                  <a:lnTo>
+                    <a:pt x="3509503" y="489206"/>
+                  </a:lnTo>
+                  <a:lnTo>
+                    <a:pt x="3437881" y="459801"/>
+                  </a:lnTo>
+                  <a:lnTo>
+                    <a:pt x="3366258" y="429145"/>
+                  </a:lnTo>
+                  <a:lnTo>
+                    <a:pt x="3294636" y="397185"/>
+                  </a:lnTo>
+                  <a:lnTo>
+                    <a:pt x="3223013" y="363866"/>
+                  </a:lnTo>
+                  <a:lnTo>
+                    <a:pt x="3151391" y="346892"/>
+                  </a:lnTo>
+                  <a:lnTo>
+                    <a:pt x="3079768" y="340274"/>
+                  </a:lnTo>
+                  <a:lnTo>
+                    <a:pt x="3008146" y="333604"/>
+                  </a:lnTo>
+                  <a:lnTo>
+                    <a:pt x="2936523" y="326880"/>
+                  </a:lnTo>
+                  <a:lnTo>
+                    <a:pt x="2864901" y="320104"/>
+                  </a:lnTo>
+                  <a:lnTo>
+                    <a:pt x="2793278" y="313273"/>
+                  </a:lnTo>
+                  <a:lnTo>
+                    <a:pt x="2721655" y="306388"/>
+                  </a:lnTo>
+                  <a:lnTo>
+                    <a:pt x="2650033" y="299449"/>
+                  </a:lnTo>
+                  <a:lnTo>
+                    <a:pt x="2578410" y="292454"/>
+                  </a:lnTo>
+                  <a:lnTo>
+                    <a:pt x="2506788" y="285404"/>
+                  </a:lnTo>
+                  <a:lnTo>
+                    <a:pt x="2435165" y="278298"/>
+                  </a:lnTo>
+                  <a:lnTo>
+                    <a:pt x="2363543" y="271136"/>
+                  </a:lnTo>
+                  <a:lnTo>
+                    <a:pt x="2291920" y="263917"/>
+                  </a:lnTo>
+                  <a:lnTo>
+                    <a:pt x="2220298" y="256640"/>
+                  </a:lnTo>
+                  <a:lnTo>
+                    <a:pt x="2148675" y="249306"/>
+                  </a:lnTo>
+                  <a:lnTo>
+                    <a:pt x="2077053" y="241913"/>
+                  </a:lnTo>
+                  <a:lnTo>
+                    <a:pt x="2005430" y="234462"/>
+                  </a:lnTo>
+                  <a:lnTo>
+                    <a:pt x="1933808" y="226951"/>
+                  </a:lnTo>
+                  <a:lnTo>
+                    <a:pt x="1862185" y="219381"/>
+                  </a:lnTo>
+                  <a:lnTo>
+                    <a:pt x="1790563" y="211751"/>
+                  </a:lnTo>
+                  <a:lnTo>
+                    <a:pt x="1718940" y="204060"/>
+                  </a:lnTo>
+                  <a:lnTo>
+                    <a:pt x="1647318" y="196308"/>
+                  </a:lnTo>
+                  <a:lnTo>
+                    <a:pt x="1575695" y="188495"/>
+                  </a:lnTo>
+                  <a:lnTo>
+                    <a:pt x="1504073" y="180620"/>
+                  </a:lnTo>
+                  <a:lnTo>
+                    <a:pt x="1432450" y="172682"/>
+                  </a:lnTo>
+                  <a:lnTo>
+                    <a:pt x="1360827" y="164681"/>
+                  </a:lnTo>
+                  <a:lnTo>
+                    <a:pt x="1289205" y="156616"/>
+                  </a:lnTo>
+                  <a:lnTo>
+                    <a:pt x="1217582" y="148488"/>
+                  </a:lnTo>
+                  <a:lnTo>
+                    <a:pt x="1145960" y="140295"/>
+                  </a:lnTo>
+                  <a:lnTo>
+                    <a:pt x="1074337" y="132037"/>
+                  </a:lnTo>
+                  <a:lnTo>
+                    <a:pt x="1002715" y="123713"/>
+                  </a:lnTo>
+                  <a:lnTo>
+                    <a:pt x="931092" y="115324"/>
+                  </a:lnTo>
+                  <a:lnTo>
+                    <a:pt x="859470" y="106867"/>
+                  </a:lnTo>
+                  <a:lnTo>
+                    <a:pt x="787847" y="98344"/>
+                  </a:lnTo>
+                  <a:lnTo>
+                    <a:pt x="716225" y="89753"/>
+                  </a:lnTo>
+                  <a:lnTo>
+                    <a:pt x="644602" y="81093"/>
+                  </a:lnTo>
+                  <a:lnTo>
+                    <a:pt x="572980" y="72365"/>
+                  </a:lnTo>
+                  <a:lnTo>
+                    <a:pt x="501357" y="63568"/>
+                  </a:lnTo>
+                  <a:lnTo>
+                    <a:pt x="429735" y="54701"/>
+                  </a:lnTo>
+                  <a:lnTo>
+                    <a:pt x="358112" y="45763"/>
+                  </a:lnTo>
+                  <a:lnTo>
+                    <a:pt x="286490" y="36755"/>
+                  </a:lnTo>
+                  <a:lnTo>
+                    <a:pt x="214867" y="27675"/>
+                  </a:lnTo>
+                  <a:lnTo>
+                    <a:pt x="143245" y="18522"/>
+                  </a:lnTo>
+                  <a:lnTo>
+                    <a:pt x="71622" y="9298"/>
                   </a:lnTo>
                   <a:lnTo>
                     <a:pt x="0" y="0"/>
@@ -4223,312 +4223,312 @@
           </p:nvSpPr>
           <p:spPr>
             <a:xfrm>
-              <a:off x="1172049" y="3018617"/>
-              <a:ext cx="7090630" cy="2327091"/>
+              <a:off x="1172049" y="3050555"/>
+              <a:ext cx="7090630" cy="2291145"/>
             </a:xfrm>
             <a:custGeom>
               <a:avLst/>
               <a:pathLst>
-                <a:path w="7090630" h="2327091">
+                <a:path w="7090630" h="2291145">
                   <a:moveTo>
                     <a:pt x="0" y="0"/>
                   </a:moveTo>
                   <a:lnTo>
-                    <a:pt x="71622" y="62928"/>
-                  </a:lnTo>
-                  <a:lnTo>
-                    <a:pt x="143245" y="124296"/>
-                  </a:lnTo>
-                  <a:lnTo>
-                    <a:pt x="214867" y="184143"/>
-                  </a:lnTo>
-                  <a:lnTo>
-                    <a:pt x="286490" y="242507"/>
-                  </a:lnTo>
-                  <a:lnTo>
-                    <a:pt x="358112" y="299424"/>
-                  </a:lnTo>
-                  <a:lnTo>
-                    <a:pt x="429735" y="354930"/>
-                  </a:lnTo>
-                  <a:lnTo>
-                    <a:pt x="501357" y="409060"/>
-                  </a:lnTo>
-                  <a:lnTo>
-                    <a:pt x="572980" y="461848"/>
-                  </a:lnTo>
-                  <a:lnTo>
-                    <a:pt x="644602" y="513328"/>
-                  </a:lnTo>
-                  <a:lnTo>
-                    <a:pt x="716225" y="563532"/>
-                  </a:lnTo>
-                  <a:lnTo>
-                    <a:pt x="787847" y="612491"/>
-                  </a:lnTo>
-                  <a:lnTo>
-                    <a:pt x="859470" y="660237"/>
-                  </a:lnTo>
-                  <a:lnTo>
-                    <a:pt x="931092" y="706799"/>
-                  </a:lnTo>
-                  <a:lnTo>
-                    <a:pt x="1002715" y="752207"/>
-                  </a:lnTo>
-                  <a:lnTo>
-                    <a:pt x="1074337" y="796489"/>
-                  </a:lnTo>
-                  <a:lnTo>
-                    <a:pt x="1145960" y="839674"/>
-                  </a:lnTo>
-                  <a:lnTo>
-                    <a:pt x="1217582" y="881788"/>
-                  </a:lnTo>
-                  <a:lnTo>
-                    <a:pt x="1289205" y="922858"/>
-                  </a:lnTo>
-                  <a:lnTo>
-                    <a:pt x="1360827" y="962910"/>
-                  </a:lnTo>
-                  <a:lnTo>
-                    <a:pt x="1432450" y="1001970"/>
-                  </a:lnTo>
-                  <a:lnTo>
-                    <a:pt x="1504073" y="1040061"/>
-                  </a:lnTo>
-                  <a:lnTo>
-                    <a:pt x="1575695" y="1077208"/>
-                  </a:lnTo>
-                  <a:lnTo>
-                    <a:pt x="1647318" y="1113434"/>
-                  </a:lnTo>
-                  <a:lnTo>
-                    <a:pt x="1718940" y="1148762"/>
-                  </a:lnTo>
-                  <a:lnTo>
-                    <a:pt x="1790563" y="1183214"/>
-                  </a:lnTo>
-                  <a:lnTo>
-                    <a:pt x="1862185" y="1216813"/>
-                  </a:lnTo>
-                  <a:lnTo>
-                    <a:pt x="1933808" y="1249578"/>
-                  </a:lnTo>
-                  <a:lnTo>
-                    <a:pt x="2005430" y="1281532"/>
-                  </a:lnTo>
-                  <a:lnTo>
-                    <a:pt x="2077053" y="1312693"/>
-                  </a:lnTo>
-                  <a:lnTo>
-                    <a:pt x="2148675" y="1343082"/>
-                  </a:lnTo>
-                  <a:lnTo>
-                    <a:pt x="2220298" y="1372717"/>
-                  </a:lnTo>
-                  <a:lnTo>
-                    <a:pt x="2291920" y="1401618"/>
-                  </a:lnTo>
-                  <a:lnTo>
-                    <a:pt x="2363543" y="1429803"/>
-                  </a:lnTo>
-                  <a:lnTo>
-                    <a:pt x="2435165" y="1457289"/>
-                  </a:lnTo>
-                  <a:lnTo>
-                    <a:pt x="2506788" y="1484093"/>
-                  </a:lnTo>
-                  <a:lnTo>
-                    <a:pt x="2578410" y="1510234"/>
-                  </a:lnTo>
-                  <a:lnTo>
-                    <a:pt x="2650033" y="1535726"/>
-                  </a:lnTo>
-                  <a:lnTo>
-                    <a:pt x="2721655" y="1560586"/>
-                  </a:lnTo>
-                  <a:lnTo>
-                    <a:pt x="2793278" y="1584830"/>
-                  </a:lnTo>
-                  <a:lnTo>
-                    <a:pt x="2864901" y="1608473"/>
-                  </a:lnTo>
-                  <a:lnTo>
-                    <a:pt x="2936523" y="1631530"/>
-                  </a:lnTo>
-                  <a:lnTo>
-                    <a:pt x="3008146" y="1654016"/>
-                  </a:lnTo>
-                  <a:lnTo>
-                    <a:pt x="3079768" y="1675944"/>
-                  </a:lnTo>
-                  <a:lnTo>
-                    <a:pt x="3151391" y="1697328"/>
-                  </a:lnTo>
-                  <a:lnTo>
-                    <a:pt x="3223013" y="1718183"/>
-                  </a:lnTo>
-                  <a:lnTo>
-                    <a:pt x="3294636" y="1738520"/>
-                  </a:lnTo>
-                  <a:lnTo>
-                    <a:pt x="3366258" y="1758354"/>
-                  </a:lnTo>
-                  <a:lnTo>
-                    <a:pt x="3437881" y="1777695"/>
-                  </a:lnTo>
-                  <a:lnTo>
-                    <a:pt x="3509503" y="1796558"/>
-                  </a:lnTo>
-                  <a:lnTo>
-                    <a:pt x="3581126" y="1814952"/>
-                  </a:lnTo>
-                  <a:lnTo>
-                    <a:pt x="3652748" y="1832891"/>
-                  </a:lnTo>
-                  <a:lnTo>
-                    <a:pt x="3724371" y="1850385"/>
-                  </a:lnTo>
-                  <a:lnTo>
-                    <a:pt x="3795993" y="1867445"/>
-                  </a:lnTo>
-                  <a:lnTo>
-                    <a:pt x="3867616" y="1884083"/>
-                  </a:lnTo>
-                  <a:lnTo>
-                    <a:pt x="3939238" y="1900308"/>
-                  </a:lnTo>
-                  <a:lnTo>
-                    <a:pt x="4010861" y="1916131"/>
-                  </a:lnTo>
-                  <a:lnTo>
-                    <a:pt x="4082483" y="1931562"/>
-                  </a:lnTo>
-                  <a:lnTo>
-                    <a:pt x="4154106" y="1946610"/>
-                  </a:lnTo>
-                  <a:lnTo>
-                    <a:pt x="4225729" y="1961285"/>
-                  </a:lnTo>
-                  <a:lnTo>
-                    <a:pt x="4297351" y="1975597"/>
-                  </a:lnTo>
-                  <a:lnTo>
-                    <a:pt x="4368974" y="1989553"/>
-                  </a:lnTo>
-                  <a:lnTo>
-                    <a:pt x="4440596" y="2003164"/>
-                  </a:lnTo>
-                  <a:lnTo>
-                    <a:pt x="4512219" y="2016437"/>
-                  </a:lnTo>
-                  <a:lnTo>
-                    <a:pt x="4583841" y="2029381"/>
-                  </a:lnTo>
-                  <a:lnTo>
-                    <a:pt x="4655464" y="2042005"/>
-                  </a:lnTo>
-                  <a:lnTo>
-                    <a:pt x="4727086" y="2054315"/>
-                  </a:lnTo>
-                  <a:lnTo>
-                    <a:pt x="4798709" y="2066321"/>
-                  </a:lnTo>
-                  <a:lnTo>
-                    <a:pt x="4870331" y="2078029"/>
-                  </a:lnTo>
-                  <a:lnTo>
-                    <a:pt x="4941954" y="2089446"/>
-                  </a:lnTo>
-                  <a:lnTo>
-                    <a:pt x="5013576" y="2100581"/>
-                  </a:lnTo>
-                  <a:lnTo>
-                    <a:pt x="5085199" y="2111439"/>
-                  </a:lnTo>
-                  <a:lnTo>
-                    <a:pt x="5156821" y="2122028"/>
-                  </a:lnTo>
-                  <a:lnTo>
-                    <a:pt x="5228444" y="2132355"/>
-                  </a:lnTo>
-                  <a:lnTo>
-                    <a:pt x="5300066" y="2142426"/>
-                  </a:lnTo>
-                  <a:lnTo>
-                    <a:pt x="5371689" y="2152247"/>
-                  </a:lnTo>
-                  <a:lnTo>
-                    <a:pt x="5443311" y="2161825"/>
-                  </a:lnTo>
-                  <a:lnTo>
-                    <a:pt x="5514934" y="2171166"/>
-                  </a:lnTo>
-                  <a:lnTo>
-                    <a:pt x="5586557" y="2180274"/>
-                  </a:lnTo>
-                  <a:lnTo>
-                    <a:pt x="5658179" y="2189158"/>
-                  </a:lnTo>
-                  <a:lnTo>
-                    <a:pt x="5729802" y="2197820"/>
-                  </a:lnTo>
-                  <a:lnTo>
-                    <a:pt x="5801424" y="2206268"/>
-                  </a:lnTo>
-                  <a:lnTo>
-                    <a:pt x="5873047" y="2214507"/>
-                  </a:lnTo>
-                  <a:lnTo>
-                    <a:pt x="5944669" y="2222542"/>
-                  </a:lnTo>
-                  <a:lnTo>
-                    <a:pt x="6016292" y="2230377"/>
-                  </a:lnTo>
-                  <a:lnTo>
-                    <a:pt x="6087914" y="2238018"/>
-                  </a:lnTo>
-                  <a:lnTo>
-                    <a:pt x="6159537" y="2245470"/>
-                  </a:lnTo>
-                  <a:lnTo>
-                    <a:pt x="6231159" y="2252737"/>
-                  </a:lnTo>
-                  <a:lnTo>
-                    <a:pt x="6302782" y="2259824"/>
-                  </a:lnTo>
-                  <a:lnTo>
-                    <a:pt x="6374404" y="2266735"/>
-                  </a:lnTo>
-                  <a:lnTo>
-                    <a:pt x="6446027" y="2273475"/>
-                  </a:lnTo>
-                  <a:lnTo>
-                    <a:pt x="6517649" y="2280047"/>
-                  </a:lnTo>
-                  <a:lnTo>
-                    <a:pt x="6589272" y="2286457"/>
-                  </a:lnTo>
-                  <a:lnTo>
-                    <a:pt x="6660894" y="2292708"/>
-                  </a:lnTo>
-                  <a:lnTo>
-                    <a:pt x="6732517" y="2298804"/>
-                  </a:lnTo>
-                  <a:lnTo>
-                    <a:pt x="6804139" y="2304749"/>
-                  </a:lnTo>
-                  <a:lnTo>
-                    <a:pt x="6875762" y="2310547"/>
-                  </a:lnTo>
-                  <a:lnTo>
-                    <a:pt x="6947385" y="2316200"/>
-                  </a:lnTo>
-                  <a:lnTo>
-                    <a:pt x="7019007" y="2321714"/>
-                  </a:lnTo>
-                  <a:lnTo>
-                    <a:pt x="7090630" y="2327091"/>
+                    <a:pt x="71622" y="61360"/>
+                  </a:lnTo>
+                  <a:lnTo>
+                    <a:pt x="143245" y="121218"/>
+                  </a:lnTo>
+                  <a:lnTo>
+                    <a:pt x="214867" y="179611"/>
+                  </a:lnTo>
+                  <a:lnTo>
+                    <a:pt x="286490" y="236575"/>
+                  </a:lnTo>
+                  <a:lnTo>
+                    <a:pt x="358112" y="292144"/>
+                  </a:lnTo>
+                  <a:lnTo>
+                    <a:pt x="429735" y="346353"/>
+                  </a:lnTo>
+                  <a:lnTo>
+                    <a:pt x="501357" y="399235"/>
+                  </a:lnTo>
+                  <a:lnTo>
+                    <a:pt x="572980" y="450823"/>
+                  </a:lnTo>
+                  <a:lnTo>
+                    <a:pt x="644602" y="501147"/>
+                  </a:lnTo>
+                  <a:lnTo>
+                    <a:pt x="716225" y="550240"/>
+                  </a:lnTo>
+                  <a:lnTo>
+                    <a:pt x="787847" y="598131"/>
+                  </a:lnTo>
+                  <a:lnTo>
+                    <a:pt x="859470" y="644850"/>
+                  </a:lnTo>
+                  <a:lnTo>
+                    <a:pt x="931092" y="690426"/>
+                  </a:lnTo>
+                  <a:lnTo>
+                    <a:pt x="1002715" y="734885"/>
+                  </a:lnTo>
+                  <a:lnTo>
+                    <a:pt x="1074337" y="778257"/>
+                  </a:lnTo>
+                  <a:lnTo>
+                    <a:pt x="1145960" y="820566"/>
+                  </a:lnTo>
+                  <a:lnTo>
+                    <a:pt x="1217582" y="861840"/>
+                  </a:lnTo>
+                  <a:lnTo>
+                    <a:pt x="1289205" y="902104"/>
+                  </a:lnTo>
+                  <a:lnTo>
+                    <a:pt x="1360827" y="941382"/>
+                  </a:lnTo>
+                  <a:lnTo>
+                    <a:pt x="1432450" y="979699"/>
+                  </a:lnTo>
+                  <a:lnTo>
+                    <a:pt x="1504073" y="1017077"/>
+                  </a:lnTo>
+                  <a:lnTo>
+                    <a:pt x="1575695" y="1053541"/>
+                  </a:lnTo>
+                  <a:lnTo>
+                    <a:pt x="1647318" y="1089112"/>
+                  </a:lnTo>
+                  <a:lnTo>
+                    <a:pt x="1718940" y="1123812"/>
+                  </a:lnTo>
+                  <a:lnTo>
+                    <a:pt x="1790563" y="1157663"/>
+                  </a:lnTo>
+                  <a:lnTo>
+                    <a:pt x="1862185" y="1190686"/>
+                  </a:lnTo>
+                  <a:lnTo>
+                    <a:pt x="1933808" y="1222900"/>
+                  </a:lnTo>
+                  <a:lnTo>
+                    <a:pt x="2005430" y="1254325"/>
+                  </a:lnTo>
+                  <a:lnTo>
+                    <a:pt x="2077053" y="1284981"/>
+                  </a:lnTo>
+                  <a:lnTo>
+                    <a:pt x="2148675" y="1314887"/>
+                  </a:lnTo>
+                  <a:lnTo>
+                    <a:pt x="2220298" y="1344061"/>
+                  </a:lnTo>
+                  <a:lnTo>
+                    <a:pt x="2291920" y="1372520"/>
+                  </a:lnTo>
+                  <a:lnTo>
+                    <a:pt x="2363543" y="1400283"/>
+                  </a:lnTo>
+                  <a:lnTo>
+                    <a:pt x="2435165" y="1427367"/>
+                  </a:lnTo>
+                  <a:lnTo>
+                    <a:pt x="2506788" y="1453787"/>
+                  </a:lnTo>
+                  <a:lnTo>
+                    <a:pt x="2578410" y="1479561"/>
+                  </a:lnTo>
+                  <a:lnTo>
+                    <a:pt x="2650033" y="1504704"/>
+                  </a:lnTo>
+                  <a:lnTo>
+                    <a:pt x="2721655" y="1529231"/>
+                  </a:lnTo>
+                  <a:lnTo>
+                    <a:pt x="2793278" y="1553158"/>
+                  </a:lnTo>
+                  <a:lnTo>
+                    <a:pt x="2864901" y="1576499"/>
+                  </a:lnTo>
+                  <a:lnTo>
+                    <a:pt x="2936523" y="1599269"/>
+                  </a:lnTo>
+                  <a:lnTo>
+                    <a:pt x="3008146" y="1621481"/>
+                  </a:lnTo>
+                  <a:lnTo>
+                    <a:pt x="3079768" y="1643150"/>
+                  </a:lnTo>
+                  <a:lnTo>
+                    <a:pt x="3151391" y="1664288"/>
+                  </a:lnTo>
+                  <a:lnTo>
+                    <a:pt x="3223013" y="1684909"/>
+                  </a:lnTo>
+                  <a:lnTo>
+                    <a:pt x="3294636" y="1705025"/>
+                  </a:lnTo>
+                  <a:lnTo>
+                    <a:pt x="3366258" y="1724649"/>
+                  </a:lnTo>
+                  <a:lnTo>
+                    <a:pt x="3437881" y="1743792"/>
+                  </a:lnTo>
+                  <a:lnTo>
+                    <a:pt x="3509503" y="1762467"/>
+                  </a:lnTo>
+                  <a:lnTo>
+                    <a:pt x="3581126" y="1780685"/>
+                  </a:lnTo>
+                  <a:lnTo>
+                    <a:pt x="3652748" y="1798456"/>
+                  </a:lnTo>
+                  <a:lnTo>
+                    <a:pt x="3724371" y="1815793"/>
+                  </a:lnTo>
+                  <a:lnTo>
+                    <a:pt x="3795993" y="1832705"/>
+                  </a:lnTo>
+                  <a:lnTo>
+                    <a:pt x="3867616" y="1849204"/>
+                  </a:lnTo>
+                  <a:lnTo>
+                    <a:pt x="3939238" y="1865298"/>
+                  </a:lnTo>
+                  <a:lnTo>
+                    <a:pt x="4010861" y="1880998"/>
+                  </a:lnTo>
+                  <a:lnTo>
+                    <a:pt x="4082483" y="1896315"/>
+                  </a:lnTo>
+                  <a:lnTo>
+                    <a:pt x="4154106" y="1911256"/>
+                  </a:lnTo>
+                  <a:lnTo>
+                    <a:pt x="4225729" y="1925831"/>
+                  </a:lnTo>
+                  <a:lnTo>
+                    <a:pt x="4297351" y="1940050"/>
+                  </a:lnTo>
+                  <a:lnTo>
+                    <a:pt x="4368974" y="1953921"/>
+                  </a:lnTo>
+                  <a:lnTo>
+                    <a:pt x="4440596" y="1967452"/>
+                  </a:lnTo>
+                  <a:lnTo>
+                    <a:pt x="4512219" y="1980652"/>
+                  </a:lnTo>
+                  <a:lnTo>
+                    <a:pt x="4583841" y="1993528"/>
+                  </a:lnTo>
+                  <a:lnTo>
+                    <a:pt x="4655464" y="2006090"/>
+                  </a:lnTo>
+                  <a:lnTo>
+                    <a:pt x="4727086" y="2018344"/>
+                  </a:lnTo>
+                  <a:lnTo>
+                    <a:pt x="4798709" y="2030298"/>
+                  </a:lnTo>
+                  <a:lnTo>
+                    <a:pt x="4870331" y="2041960"/>
+                  </a:lnTo>
+                  <a:lnTo>
+                    <a:pt x="4941954" y="2053336"/>
+                  </a:lnTo>
+                  <a:lnTo>
+                    <a:pt x="5013576" y="2064433"/>
+                  </a:lnTo>
+                  <a:lnTo>
+                    <a:pt x="5085199" y="2075259"/>
+                  </a:lnTo>
+                  <a:lnTo>
+                    <a:pt x="5156821" y="2085820"/>
+                  </a:lnTo>
+                  <a:lnTo>
+                    <a:pt x="5228444" y="2096122"/>
+                  </a:lnTo>
+                  <a:lnTo>
+                    <a:pt x="5300066" y="2106173"/>
+                  </a:lnTo>
+                  <a:lnTo>
+                    <a:pt x="5371689" y="2115977"/>
+                  </a:lnTo>
+                  <a:lnTo>
+                    <a:pt x="5443311" y="2125541"/>
+                  </a:lnTo>
+                  <a:lnTo>
+                    <a:pt x="5514934" y="2134871"/>
+                  </a:lnTo>
+                  <a:lnTo>
+                    <a:pt x="5586557" y="2143973"/>
+                  </a:lnTo>
+                  <a:lnTo>
+                    <a:pt x="5658179" y="2152852"/>
+                  </a:lnTo>
+                  <a:lnTo>
+                    <a:pt x="5729802" y="2161513"/>
+                  </a:lnTo>
+                  <a:lnTo>
+                    <a:pt x="5801424" y="2169963"/>
+                  </a:lnTo>
+                  <a:lnTo>
+                    <a:pt x="5873047" y="2178206"/>
+                  </a:lnTo>
+                  <a:lnTo>
+                    <a:pt x="5944669" y="2186246"/>
+                  </a:lnTo>
+                  <a:lnTo>
+                    <a:pt x="6016292" y="2194091"/>
+                  </a:lnTo>
+                  <a:lnTo>
+                    <a:pt x="6087914" y="2201743"/>
+                  </a:lnTo>
+                  <a:lnTo>
+                    <a:pt x="6159537" y="2209207"/>
+                  </a:lnTo>
+                  <a:lnTo>
+                    <a:pt x="6231159" y="2216489"/>
+                  </a:lnTo>
+                  <a:lnTo>
+                    <a:pt x="6302782" y="2223593"/>
+                  </a:lnTo>
+                  <a:lnTo>
+                    <a:pt x="6374404" y="2230523"/>
+                  </a:lnTo>
+                  <a:lnTo>
+                    <a:pt x="6446027" y="2237283"/>
+                  </a:lnTo>
+                  <a:lnTo>
+                    <a:pt x="6517649" y="2243878"/>
+                  </a:lnTo>
+                  <a:lnTo>
+                    <a:pt x="6589272" y="2250312"/>
+                  </a:lnTo>
+                  <a:lnTo>
+                    <a:pt x="6660894" y="2256587"/>
+                  </a:lnTo>
+                  <a:lnTo>
+                    <a:pt x="6732517" y="2262710"/>
+                  </a:lnTo>
+                  <a:lnTo>
+                    <a:pt x="6804139" y="2268682"/>
+                  </a:lnTo>
+                  <a:lnTo>
+                    <a:pt x="6875762" y="2274508"/>
+                  </a:lnTo>
+                  <a:lnTo>
+                    <a:pt x="6947385" y="2280192"/>
+                  </a:lnTo>
+                  <a:lnTo>
+                    <a:pt x="7019007" y="2285736"/>
+                  </a:lnTo>
+                  <a:lnTo>
+                    <a:pt x="7090630" y="2291145"/>
                   </a:lnTo>
                 </a:path>
               </a:pathLst>
@@ -4600,7 +4600,7 @@
           </p:nvSpPr>
           <p:spPr>
             <a:xfrm>
-              <a:off x="4363883" y="2073503"/>
+              <a:off x="4368185" y="2073503"/>
               <a:ext cx="0" cy="3649639"/>
             </a:xfrm>
             <a:custGeom>
@@ -4643,7 +4643,7 @@
           </p:nvSpPr>
           <p:spPr>
             <a:xfrm>
-              <a:off x="3178931" y="2073503"/>
+              <a:off x="3176242" y="2073503"/>
               <a:ext cx="0" cy="3649639"/>
             </a:xfrm>
             <a:custGeom>
@@ -4686,7 +4686,7 @@
           </p:nvSpPr>
           <p:spPr>
             <a:xfrm>
-              <a:off x="5373904" y="2073503"/>
+              <a:off x="5386913" y="2073503"/>
               <a:ext cx="0" cy="3649639"/>
             </a:xfrm>
             <a:custGeom>
@@ -4959,7 +4959,7 @@
           </p:nvSpPr>
           <p:spPr>
             <a:xfrm>
-              <a:off x="1536080" y="5785772"/>
+              <a:off x="1536741" y="5785772"/>
               <a:ext cx="161574" cy="80101"/>
             </a:xfrm>
             <a:prstGeom prst="rect">
@@ -5005,7 +5005,7 @@
           </p:nvSpPr>
           <p:spPr>
             <a:xfrm>
-              <a:off x="3342736" y="5785772"/>
+              <a:off x="3341771" y="5785772"/>
               <a:ext cx="161574" cy="80101"/>
             </a:xfrm>
             <a:prstGeom prst="rect">
@@ -5051,7 +5051,7 @@
           </p:nvSpPr>
           <p:spPr>
             <a:xfrm>
-              <a:off x="5199088" y="5785772"/>
+              <a:off x="5196500" y="5785772"/>
               <a:ext cx="62179" cy="80101"/>
             </a:xfrm>
             <a:prstGeom prst="rect">
@@ -5097,7 +5097,7 @@
           </p:nvSpPr>
           <p:spPr>
             <a:xfrm>
-              <a:off x="6974654" y="5785772"/>
+              <a:off x="6970441" y="5785772"/>
               <a:ext cx="124358" cy="80101"/>
             </a:xfrm>
             <a:prstGeom prst="rect">
@@ -5268,7 +5268,7 @@
                   <a:latin typeface="Helvetica"/>
                   <a:cs typeface="Helvetica"/>
                 </a:rPr>
-                <a:t>subHR per 10 % decline: 1.37 (1.11-1.69), p_Bonf = 0.020 (n = 6)  |  per IQR decline (Δ = 24.3 %): 2.16 (1.29-3.60)  |  IQR: [-22.7, 1.6] %</a:t>
+                <a:t>subHR per 10 % decline: 1.37 (1.10-1.69), p_Bonf = 0.024 (n = 6)  |  per IQR decline (Δ = 24.5 %): 2.15 (1.28-3.62)  |  IQR: [-22.7, 1.8] %</a:t>
               </a:r>
             </a:p>
           </p:txBody>
